--- a/public/lessons/year-6-maths/spring/week-14/solve-fraction-division-problems/teaching-powerpoint-v1.pptx
+++ b/public/lessons/year-6-maths/spring/week-14/solve-fraction-division-problems/teaching-powerpoint-v1.pptx
@@ -2,24 +2,24 @@
 <file path=ppt/presentation.xml><?xml version="1.0" encoding="utf-8"?>
 <p:presentation xmlns:p="http://schemas.openxmlformats.org/presentationml/2006/main">
   <p:sldMasterIdLst>
-    <p:sldMasterId xmlns:r="http://schemas.openxmlformats.org/officeDocument/2006/relationships" id="2147483648" r:id="Radcdab4a2210464d"/>
+    <p:sldMasterId xmlns:r="http://schemas.openxmlformats.org/officeDocument/2006/relationships" id="2147483648" r:id="R6376a33509d64f4a"/>
   </p:sldMasterIdLst>
   <p:notesMasterIdLst>
-    <p:notesMasterId xmlns:r="http://schemas.openxmlformats.org/officeDocument/2006/relationships" r:id="R7d55e9203687459a"/>
+    <p:notesMasterId xmlns:r="http://schemas.openxmlformats.org/officeDocument/2006/relationships" r:id="R7cb3f3afb0094641"/>
   </p:notesMasterIdLst>
   <p:sldIdLst>
-    <p:sldId xmlns:r="http://schemas.openxmlformats.org/officeDocument/2006/relationships" id="256" r:id="R79364904795446a6"/>
-    <p:sldId xmlns:r="http://schemas.openxmlformats.org/officeDocument/2006/relationships" id="257" r:id="R9d5c0aa72dc74c1d"/>
-    <p:sldId xmlns:r="http://schemas.openxmlformats.org/officeDocument/2006/relationships" id="258" r:id="R7c77830bdb9b4b61"/>
-    <p:sldId xmlns:r="http://schemas.openxmlformats.org/officeDocument/2006/relationships" id="259" r:id="Rcb7241d8514649ea"/>
-    <p:sldId xmlns:r="http://schemas.openxmlformats.org/officeDocument/2006/relationships" id="260" r:id="Rb71d38d35cce4c44"/>
-    <p:sldId xmlns:r="http://schemas.openxmlformats.org/officeDocument/2006/relationships" id="261" r:id="R2487f09605764784"/>
-    <p:sldId xmlns:r="http://schemas.openxmlformats.org/officeDocument/2006/relationships" id="262" r:id="R4d9038e6d3064efb"/>
-    <p:sldId xmlns:r="http://schemas.openxmlformats.org/officeDocument/2006/relationships" id="263" r:id="Rfabb9d0185684b27"/>
-    <p:sldId xmlns:r="http://schemas.openxmlformats.org/officeDocument/2006/relationships" id="264" r:id="Rff798dc9cab24fb2"/>
-    <p:sldId xmlns:r="http://schemas.openxmlformats.org/officeDocument/2006/relationships" id="265" r:id="R5f10e1b1c7c144ae"/>
-    <p:sldId xmlns:r="http://schemas.openxmlformats.org/officeDocument/2006/relationships" id="266" r:id="R5624a966645647bc"/>
-    <p:sldId xmlns:r="http://schemas.openxmlformats.org/officeDocument/2006/relationships" id="267" r:id="R4428e55c34954319"/>
+    <p:sldId xmlns:r="http://schemas.openxmlformats.org/officeDocument/2006/relationships" id="256" r:id="Reccad7552eb84c8e"/>
+    <p:sldId xmlns:r="http://schemas.openxmlformats.org/officeDocument/2006/relationships" id="257" r:id="Rd47f13737e12427e"/>
+    <p:sldId xmlns:r="http://schemas.openxmlformats.org/officeDocument/2006/relationships" id="258" r:id="R13f32074d9344d7c"/>
+    <p:sldId xmlns:r="http://schemas.openxmlformats.org/officeDocument/2006/relationships" id="259" r:id="R9b3d76575c1d4283"/>
+    <p:sldId xmlns:r="http://schemas.openxmlformats.org/officeDocument/2006/relationships" id="260" r:id="R07f9d1b7d4e743ea"/>
+    <p:sldId xmlns:r="http://schemas.openxmlformats.org/officeDocument/2006/relationships" id="261" r:id="Rd2dd91217eea4263"/>
+    <p:sldId xmlns:r="http://schemas.openxmlformats.org/officeDocument/2006/relationships" id="262" r:id="R2a496f1e7b224151"/>
+    <p:sldId xmlns:r="http://schemas.openxmlformats.org/officeDocument/2006/relationships" id="263" r:id="R721971a176da43e6"/>
+    <p:sldId xmlns:r="http://schemas.openxmlformats.org/officeDocument/2006/relationships" id="264" r:id="R9ac7e70f5d8f49ae"/>
+    <p:sldId xmlns:r="http://schemas.openxmlformats.org/officeDocument/2006/relationships" id="265" r:id="R1e054058002640e5"/>
+    <p:sldId xmlns:r="http://schemas.openxmlformats.org/officeDocument/2006/relationships" id="266" r:id="R1c9243218000437b"/>
+    <p:sldId xmlns:r="http://schemas.openxmlformats.org/officeDocument/2006/relationships" id="267" r:id="Rcec2502e19114af1"/>
   </p:sldIdLst>
   <p:sldSz cx="12192000" cy="6858000"/>
   <p:notesSz cx="6858000" cy="9144000"/>
@@ -873,7 +873,7 @@
           <a:lstStyle xmlns:a="http://schemas.openxmlformats.org/drawingml/2006/main"/>
           <a:p xmlns:a="http://schemas.openxmlformats.org/drawingml/2006/main">
             <a:r>
-              <a:t>I do. Reveal the question, setup and each calculation stage one click at a time. Pupils watch before copying. Model answer: 7/24 litre.</a:t>
+              <a:t>I do. Reveal the question, then reveal each mathematical change one click at a time. Point to the numbers and operation that changed before moving to the next line. Final answer: 7/24 litre.</a:t>
             </a:r>
           </a:p>
         </p:txBody>
@@ -1291,7 +1291,7 @@
   </p:cSld>
   <p:clrMap bg1="lt1" tx1="dk1" bg2="lt2" tx2="dk2" accent1="accent1" accent2="accent2" accent3="accent3" accent4="accent4" accent5="accent5" accent6="accent6" hlink="hlink" folHlink="folHlink"/>
   <p:sldLayoutIdLst>
-    <p:sldLayoutId xmlns:r="http://schemas.openxmlformats.org/officeDocument/2006/relationships" id="2147483649" r:id="R2d3a29fb2e6b4d4e"/>
+    <p:sldLayoutId xmlns:r="http://schemas.openxmlformats.org/officeDocument/2006/relationships" id="2147483649" r:id="R2ff97afa66324717"/>
   </p:sldLayoutIdLst>
   <p:txStyles>
     <p:titleStyle>
@@ -1842,7 +1842,7 @@
           <p:cNvPr id="12" name="">
             <a:extLst xmlns:a="http://schemas.openxmlformats.org/drawingml/2006/main">
               <a:ext uri="{FF2B5EF4-FFF2-40B4-BE49-F238E27FC236}">
-                <a16:creationId xmlns:a16="http://schemas.microsoft.com/office/drawing/2014/main" id="{F26EC724-4C2F-44C5-B925-E985D0AED41E}"/>
+                <a16:creationId xmlns:a16="http://schemas.microsoft.com/office/drawing/2014/main" id="{B1965993-0B88-40AA-90D0-32AB7AE27F58}"/>
               </a:ext>
             </a:extLst>
           </p:cNvPr>
@@ -1874,7 +1874,7 @@
           <p:cNvPr id="2" name="">
             <a:extLst xmlns:a="http://schemas.openxmlformats.org/drawingml/2006/main">
               <a:ext uri="{FF2B5EF4-FFF2-40B4-BE49-F238E27FC236}">
-                <a16:creationId xmlns:a16="http://schemas.microsoft.com/office/drawing/2014/main" id="{2D213921-28C8-4BAF-A88F-19E5EC2C0443}"/>
+                <a16:creationId xmlns:a16="http://schemas.microsoft.com/office/drawing/2014/main" id="{27889D61-F95E-4B27-92B9-A1983D4AF2EE}"/>
               </a:ext>
             </a:extLst>
           </p:cNvPr>
@@ -1931,7 +1931,7 @@
           <p:cNvPr id="3" name="">
             <a:extLst xmlns:a="http://schemas.openxmlformats.org/drawingml/2006/main">
               <a:ext uri="{FF2B5EF4-FFF2-40B4-BE49-F238E27FC236}">
-                <a16:creationId xmlns:a16="http://schemas.microsoft.com/office/drawing/2014/main" id="{F3182D5D-4584-4D9F-91B1-B4C289852B30}"/>
+                <a16:creationId xmlns:a16="http://schemas.microsoft.com/office/drawing/2014/main" id="{D219654F-BB47-4DDB-AD8E-EC0A2EB4B547}"/>
               </a:ext>
             </a:extLst>
           </p:cNvPr>
@@ -1965,7 +1965,7 @@
           <p:cNvPr id="4" name="">
             <a:extLst xmlns:a="http://schemas.openxmlformats.org/drawingml/2006/main">
               <a:ext uri="{FF2B5EF4-FFF2-40B4-BE49-F238E27FC236}">
-                <a16:creationId xmlns:a16="http://schemas.microsoft.com/office/drawing/2014/main" id="{011C7226-7648-41A2-8D2A-5724FD699FE7}"/>
+                <a16:creationId xmlns:a16="http://schemas.microsoft.com/office/drawing/2014/main" id="{A810D995-764C-42BE-9C18-BF0FA4F59865}"/>
               </a:ext>
             </a:extLst>
           </p:cNvPr>
@@ -2022,7 +2022,7 @@
           <p:cNvPr id="5" name="">
             <a:extLst xmlns:a="http://schemas.openxmlformats.org/drawingml/2006/main">
               <a:ext uri="{FF2B5EF4-FFF2-40B4-BE49-F238E27FC236}">
-                <a16:creationId xmlns:a16="http://schemas.microsoft.com/office/drawing/2014/main" id="{82D9361A-2C3B-4BDB-B58C-A41EACC45ED2}"/>
+                <a16:creationId xmlns:a16="http://schemas.microsoft.com/office/drawing/2014/main" id="{F7EB4109-04AB-4DBF-8201-1B02B7DA4FE4}"/>
               </a:ext>
             </a:extLst>
           </p:cNvPr>
@@ -2079,7 +2079,7 @@
           <p:cNvPr id="6" name="">
             <a:extLst xmlns:a="http://schemas.openxmlformats.org/drawingml/2006/main">
               <a:ext uri="{FF2B5EF4-FFF2-40B4-BE49-F238E27FC236}">
-                <a16:creationId xmlns:a16="http://schemas.microsoft.com/office/drawing/2014/main" id="{1D4EE237-BE5C-44DE-BEBC-D62E0D502EC2}"/>
+                <a16:creationId xmlns:a16="http://schemas.microsoft.com/office/drawing/2014/main" id="{9F8753A6-027E-47ED-9AF5-3925C09DA6D9}"/>
               </a:ext>
             </a:extLst>
           </p:cNvPr>
@@ -2113,7 +2113,7 @@
           <p:cNvPr id="7" name="">
             <a:extLst xmlns:a="http://schemas.openxmlformats.org/drawingml/2006/main">
               <a:ext uri="{FF2B5EF4-FFF2-40B4-BE49-F238E27FC236}">
-                <a16:creationId xmlns:a16="http://schemas.microsoft.com/office/drawing/2014/main" id="{914DC00E-F32B-4468-AAE1-A1FA4B014402}"/>
+                <a16:creationId xmlns:a16="http://schemas.microsoft.com/office/drawing/2014/main" id="{939BDC1B-D964-4B2F-9947-8DE35439472A}"/>
               </a:ext>
             </a:extLst>
           </p:cNvPr>
@@ -2170,7 +2170,7 @@
           <p:cNvPr id="8" name="">
             <a:extLst xmlns:a="http://schemas.openxmlformats.org/drawingml/2006/main">
               <a:ext uri="{FF2B5EF4-FFF2-40B4-BE49-F238E27FC236}">
-                <a16:creationId xmlns:a16="http://schemas.microsoft.com/office/drawing/2014/main" id="{9A08EAFA-5D2A-483A-97E3-1BA94AB63BA3}"/>
+                <a16:creationId xmlns:a16="http://schemas.microsoft.com/office/drawing/2014/main" id="{9901ECD7-F053-455A-8F11-5306B75CBFF7}"/>
               </a:ext>
             </a:extLst>
           </p:cNvPr>
@@ -2227,7 +2227,7 @@
           <p:cNvPr id="9" name="">
             <a:extLst xmlns:a="http://schemas.openxmlformats.org/drawingml/2006/main">
               <a:ext uri="{FF2B5EF4-FFF2-40B4-BE49-F238E27FC236}">
-                <a16:creationId xmlns:a16="http://schemas.microsoft.com/office/drawing/2014/main" id="{CC8C2C68-3DC4-473F-AAF3-4CFEFAD8BF8A}"/>
+                <a16:creationId xmlns:a16="http://schemas.microsoft.com/office/drawing/2014/main" id="{E660DE69-6465-40C3-B3C0-28D3AC7E7B51}"/>
               </a:ext>
             </a:extLst>
           </p:cNvPr>
@@ -2284,7 +2284,7 @@
           <p:cNvPr id="10" name="">
             <a:extLst xmlns:a="http://schemas.openxmlformats.org/drawingml/2006/main">
               <a:ext uri="{FF2B5EF4-FFF2-40B4-BE49-F238E27FC236}">
-                <a16:creationId xmlns:a16="http://schemas.microsoft.com/office/drawing/2014/main" id="{02506061-33A2-481A-A3F7-C8BCCB6549ED}"/>
+                <a16:creationId xmlns:a16="http://schemas.microsoft.com/office/drawing/2014/main" id="{38C1A83B-E34D-48AE-9C8C-F542843CEAF2}"/>
               </a:ext>
             </a:extLst>
           </p:cNvPr>
@@ -2341,7 +2341,7 @@
           <p:cNvPr id="11" name="">
             <a:extLst xmlns:a="http://schemas.openxmlformats.org/drawingml/2006/main">
               <a:ext uri="{FF2B5EF4-FFF2-40B4-BE49-F238E27FC236}">
-                <a16:creationId xmlns:a16="http://schemas.microsoft.com/office/drawing/2014/main" id="{35D98402-D559-44BB-AB69-3FDF44C7342C}"/>
+                <a16:creationId xmlns:a16="http://schemas.microsoft.com/office/drawing/2014/main" id="{5B54E8AF-4824-4242-B947-05FAA2816086}"/>
               </a:ext>
             </a:extLst>
           </p:cNvPr>
@@ -2396,7 +2396,7 @@
     </p:spTree>
     <p:extLst>
       <p:ext uri="{BB962C8B-B14F-4D97-AF65-F5344CB8AC3E}">
-        <p14:creationId xmlns:p14="http://schemas.microsoft.com/office/powerpoint/2010/main" val="602589983"/>
+        <p14:creationId xmlns:p14="http://schemas.microsoft.com/office/powerpoint/2010/main" val="513290226"/>
       </p:ext>
     </p:extLst>
   </p:cSld>
@@ -2427,7 +2427,7 @@
           <p:cNvPr id="14" name="">
             <a:extLst xmlns:a="http://schemas.openxmlformats.org/drawingml/2006/main">
               <a:ext uri="{FF2B5EF4-FFF2-40B4-BE49-F238E27FC236}">
-                <a16:creationId xmlns:a16="http://schemas.microsoft.com/office/drawing/2014/main" id="{CB0FFAD8-0C9D-42E2-BE48-760940C49547}"/>
+                <a16:creationId xmlns:a16="http://schemas.microsoft.com/office/drawing/2014/main" id="{2FC83F09-7140-4DAE-B125-0CA7E219C93B}"/>
               </a:ext>
             </a:extLst>
           </p:cNvPr>
@@ -2459,7 +2459,7 @@
           <p:cNvPr id="2" name="">
             <a:extLst xmlns:a="http://schemas.openxmlformats.org/drawingml/2006/main">
               <a:ext uri="{FF2B5EF4-FFF2-40B4-BE49-F238E27FC236}">
-                <a16:creationId xmlns:a16="http://schemas.microsoft.com/office/drawing/2014/main" id="{C390748B-0FE2-4821-8AF0-991020529D7E}"/>
+                <a16:creationId xmlns:a16="http://schemas.microsoft.com/office/drawing/2014/main" id="{5D8C2E08-2AE9-462F-9C44-71F2AAC258CC}"/>
               </a:ext>
             </a:extLst>
           </p:cNvPr>
@@ -2516,7 +2516,7 @@
           <p:cNvPr id="3" name="">
             <a:extLst xmlns:a="http://schemas.openxmlformats.org/drawingml/2006/main">
               <a:ext uri="{FF2B5EF4-FFF2-40B4-BE49-F238E27FC236}">
-                <a16:creationId xmlns:a16="http://schemas.microsoft.com/office/drawing/2014/main" id="{1D14DBD1-A3C6-458A-B8AE-F130C53A1525}"/>
+                <a16:creationId xmlns:a16="http://schemas.microsoft.com/office/drawing/2014/main" id="{45B3F938-7C9C-4434-9E86-93948A4F087F}"/>
               </a:ext>
             </a:extLst>
           </p:cNvPr>
@@ -2548,7 +2548,7 @@
           <p:cNvPr id="4" name="">
             <a:extLst xmlns:a="http://schemas.openxmlformats.org/drawingml/2006/main">
               <a:ext uri="{FF2B5EF4-FFF2-40B4-BE49-F238E27FC236}">
-                <a16:creationId xmlns:a16="http://schemas.microsoft.com/office/drawing/2014/main" id="{5E6D9AED-AA3B-4050-B84F-52875E4F28FC}"/>
+                <a16:creationId xmlns:a16="http://schemas.microsoft.com/office/drawing/2014/main" id="{D268D630-7072-4B5C-A5AE-8DA8FCD8EFB3}"/>
               </a:ext>
             </a:extLst>
           </p:cNvPr>
@@ -2605,7 +2605,7 @@
           <p:cNvPr id="5" name="">
             <a:extLst xmlns:a="http://schemas.openxmlformats.org/drawingml/2006/main">
               <a:ext uri="{FF2B5EF4-FFF2-40B4-BE49-F238E27FC236}">
-                <a16:creationId xmlns:a16="http://schemas.microsoft.com/office/drawing/2014/main" id="{FAB21EFB-B907-4DE0-BD70-20B50DC45D31}"/>
+                <a16:creationId xmlns:a16="http://schemas.microsoft.com/office/drawing/2014/main" id="{A815D700-179D-4A8A-8C0F-0AB0134CE1AE}"/>
               </a:ext>
             </a:extLst>
           </p:cNvPr>
@@ -2662,7 +2662,7 @@
           <p:cNvPr id="6" name="">
             <a:extLst xmlns:a="http://schemas.openxmlformats.org/drawingml/2006/main">
               <a:ext uri="{FF2B5EF4-FFF2-40B4-BE49-F238E27FC236}">
-                <a16:creationId xmlns:a16="http://schemas.microsoft.com/office/drawing/2014/main" id="{12B2C235-CAED-4B8C-8096-3451B06F6733}"/>
+                <a16:creationId xmlns:a16="http://schemas.microsoft.com/office/drawing/2014/main" id="{E93008D6-E41E-478C-B97A-1F042DB59CE3}"/>
               </a:ext>
             </a:extLst>
           </p:cNvPr>
@@ -2719,7 +2719,7 @@
           <p:cNvPr id="7" name="">
             <a:extLst xmlns:a="http://schemas.openxmlformats.org/drawingml/2006/main">
               <a:ext uri="{FF2B5EF4-FFF2-40B4-BE49-F238E27FC236}">
-                <a16:creationId xmlns:a16="http://schemas.microsoft.com/office/drawing/2014/main" id="{A81CBC3C-630A-49DA-88FB-AB32C3BCD895}"/>
+                <a16:creationId xmlns:a16="http://schemas.microsoft.com/office/drawing/2014/main" id="{D3985325-8783-402D-AE9E-F0BC31669968}"/>
               </a:ext>
             </a:extLst>
           </p:cNvPr>
@@ -2751,7 +2751,7 @@
           <p:cNvPr id="8" name="">
             <a:extLst xmlns:a="http://schemas.openxmlformats.org/drawingml/2006/main">
               <a:ext uri="{FF2B5EF4-FFF2-40B4-BE49-F238E27FC236}">
-                <a16:creationId xmlns:a16="http://schemas.microsoft.com/office/drawing/2014/main" id="{190FECDA-1BB2-4984-B5EC-DD534C30A0F1}"/>
+                <a16:creationId xmlns:a16="http://schemas.microsoft.com/office/drawing/2014/main" id="{95692026-C626-4725-A89A-3B5E2BC2065E}"/>
               </a:ext>
             </a:extLst>
           </p:cNvPr>
@@ -2808,7 +2808,7 @@
           <p:cNvPr id="9" name="">
             <a:extLst xmlns:a="http://schemas.openxmlformats.org/drawingml/2006/main">
               <a:ext uri="{FF2B5EF4-FFF2-40B4-BE49-F238E27FC236}">
-                <a16:creationId xmlns:a16="http://schemas.microsoft.com/office/drawing/2014/main" id="{2C0F22BA-5EED-419D-B5D0-8951968EA120}"/>
+                <a16:creationId xmlns:a16="http://schemas.microsoft.com/office/drawing/2014/main" id="{9772A0A1-D490-4613-BB34-0B74C5ACE033}"/>
               </a:ext>
             </a:extLst>
           </p:cNvPr>
@@ -2865,7 +2865,7 @@
           <p:cNvPr id="10" name="">
             <a:extLst xmlns:a="http://schemas.openxmlformats.org/drawingml/2006/main">
               <a:ext uri="{FF2B5EF4-FFF2-40B4-BE49-F238E27FC236}">
-                <a16:creationId xmlns:a16="http://schemas.microsoft.com/office/drawing/2014/main" id="{6C042AFF-AC11-4028-BFCF-49E1CDEB5459}"/>
+                <a16:creationId xmlns:a16="http://schemas.microsoft.com/office/drawing/2014/main" id="{4BD67577-F64C-4D49-9AC3-795D27314FDE}"/>
               </a:ext>
             </a:extLst>
           </p:cNvPr>
@@ -2922,7 +2922,7 @@
           <p:cNvPr id="11" name="">
             <a:extLst xmlns:a="http://schemas.openxmlformats.org/drawingml/2006/main">
               <a:ext uri="{FF2B5EF4-FFF2-40B4-BE49-F238E27FC236}">
-                <a16:creationId xmlns:a16="http://schemas.microsoft.com/office/drawing/2014/main" id="{C0A260D6-337F-452B-BA0F-17B77E3B787B}"/>
+                <a16:creationId xmlns:a16="http://schemas.microsoft.com/office/drawing/2014/main" id="{38293F19-8427-4A06-8211-9E7663108616}"/>
               </a:ext>
             </a:extLst>
           </p:cNvPr>
@@ -2979,7 +2979,7 @@
           <p:cNvPr id="12" name="">
             <a:extLst xmlns:a="http://schemas.openxmlformats.org/drawingml/2006/main">
               <a:ext uri="{FF2B5EF4-FFF2-40B4-BE49-F238E27FC236}">
-                <a16:creationId xmlns:a16="http://schemas.microsoft.com/office/drawing/2014/main" id="{CE037D3F-EF63-440B-A28F-B1D0C8D67661}"/>
+                <a16:creationId xmlns:a16="http://schemas.microsoft.com/office/drawing/2014/main" id="{9886C0CE-49D7-4855-BE93-26EB0128CA5F}"/>
               </a:ext>
             </a:extLst>
           </p:cNvPr>
@@ -3036,7 +3036,7 @@
           <p:cNvPr id="13" name="">
             <a:extLst xmlns:a="http://schemas.openxmlformats.org/drawingml/2006/main">
               <a:ext uri="{FF2B5EF4-FFF2-40B4-BE49-F238E27FC236}">
-                <a16:creationId xmlns:a16="http://schemas.microsoft.com/office/drawing/2014/main" id="{882827AB-AF36-4A80-BD97-002E44E948A2}"/>
+                <a16:creationId xmlns:a16="http://schemas.microsoft.com/office/drawing/2014/main" id="{0620BF7E-86CA-45D9-8764-FC2A86E269DC}"/>
               </a:ext>
             </a:extLst>
           </p:cNvPr>
@@ -3091,7 +3091,7 @@
     </p:spTree>
     <p:extLst>
       <p:ext uri="{BB962C8B-B14F-4D97-AF65-F5344CB8AC3E}">
-        <p14:creationId xmlns:p14="http://schemas.microsoft.com/office/powerpoint/2010/main" val="233628852"/>
+        <p14:creationId xmlns:p14="http://schemas.microsoft.com/office/powerpoint/2010/main" val="1738237740"/>
       </p:ext>
     </p:extLst>
   </p:cSld>
@@ -3292,7 +3292,7 @@
           <p:cNvPr id="19" name="">
             <a:extLst xmlns:a="http://schemas.openxmlformats.org/drawingml/2006/main">
               <a:ext uri="{FF2B5EF4-FFF2-40B4-BE49-F238E27FC236}">
-                <a16:creationId xmlns:a16="http://schemas.microsoft.com/office/drawing/2014/main" id="{699FFFCD-285C-4275-9010-13C15563D641}"/>
+                <a16:creationId xmlns:a16="http://schemas.microsoft.com/office/drawing/2014/main" id="{6E7740AC-F5A8-40DB-8B5E-915DB787EA0A}"/>
               </a:ext>
             </a:extLst>
           </p:cNvPr>
@@ -3324,7 +3324,7 @@
           <p:cNvPr id="2" name="">
             <a:extLst xmlns:a="http://schemas.openxmlformats.org/drawingml/2006/main">
               <a:ext uri="{FF2B5EF4-FFF2-40B4-BE49-F238E27FC236}">
-                <a16:creationId xmlns:a16="http://schemas.microsoft.com/office/drawing/2014/main" id="{53EC7D58-A1B2-4A15-9C6E-7E2BB62F1278}"/>
+                <a16:creationId xmlns:a16="http://schemas.microsoft.com/office/drawing/2014/main" id="{A1CC010D-9B19-42A7-9A6F-BFB019BA0B29}"/>
               </a:ext>
             </a:extLst>
           </p:cNvPr>
@@ -3381,7 +3381,7 @@
           <p:cNvPr id="3" name="">
             <a:extLst xmlns:a="http://schemas.openxmlformats.org/drawingml/2006/main">
               <a:ext uri="{FF2B5EF4-FFF2-40B4-BE49-F238E27FC236}">
-                <a16:creationId xmlns:a16="http://schemas.microsoft.com/office/drawing/2014/main" id="{48DDAE6D-4B06-4124-B736-383AD4B25707}"/>
+                <a16:creationId xmlns:a16="http://schemas.microsoft.com/office/drawing/2014/main" id="{DA1FBA39-6A1E-4F65-AE09-211BE25E9B70}"/>
               </a:ext>
             </a:extLst>
           </p:cNvPr>
@@ -3413,7 +3413,7 @@
           <p:cNvPr id="4" name="">
             <a:extLst xmlns:a="http://schemas.openxmlformats.org/drawingml/2006/main">
               <a:ext uri="{FF2B5EF4-FFF2-40B4-BE49-F238E27FC236}">
-                <a16:creationId xmlns:a16="http://schemas.microsoft.com/office/drawing/2014/main" id="{79F99D09-481F-4502-B2FA-4C14FAE7F6C6}"/>
+                <a16:creationId xmlns:a16="http://schemas.microsoft.com/office/drawing/2014/main" id="{706F7973-CC55-49A4-BD2C-1884B1F0A96C}"/>
               </a:ext>
             </a:extLst>
           </p:cNvPr>
@@ -3470,7 +3470,7 @@
           <p:cNvPr id="5" name="">
             <a:extLst xmlns:a="http://schemas.openxmlformats.org/drawingml/2006/main">
               <a:ext uri="{FF2B5EF4-FFF2-40B4-BE49-F238E27FC236}">
-                <a16:creationId xmlns:a16="http://schemas.microsoft.com/office/drawing/2014/main" id="{D7DFF815-4920-40A3-881A-FBC9E0494AAB}"/>
+                <a16:creationId xmlns:a16="http://schemas.microsoft.com/office/drawing/2014/main" id="{1A25709A-2A89-459F-B23F-AF34503A928D}"/>
               </a:ext>
             </a:extLst>
           </p:cNvPr>
@@ -3527,7 +3527,7 @@
           <p:cNvPr id="6" name="">
             <a:extLst xmlns:a="http://schemas.openxmlformats.org/drawingml/2006/main">
               <a:ext uri="{FF2B5EF4-FFF2-40B4-BE49-F238E27FC236}">
-                <a16:creationId xmlns:a16="http://schemas.microsoft.com/office/drawing/2014/main" id="{990B6132-A626-4DF7-B42E-107D30F37989}"/>
+                <a16:creationId xmlns:a16="http://schemas.microsoft.com/office/drawing/2014/main" id="{85048ACD-0068-490C-8B2E-3295EF57DCD4}"/>
               </a:ext>
             </a:extLst>
           </p:cNvPr>
@@ -3584,7 +3584,7 @@
           <p:cNvPr id="7" name="">
             <a:extLst xmlns:a="http://schemas.openxmlformats.org/drawingml/2006/main">
               <a:ext uri="{FF2B5EF4-FFF2-40B4-BE49-F238E27FC236}">
-                <a16:creationId xmlns:a16="http://schemas.microsoft.com/office/drawing/2014/main" id="{B05C5117-1CDE-4A32-B320-30106590A59B}"/>
+                <a16:creationId xmlns:a16="http://schemas.microsoft.com/office/drawing/2014/main" id="{714ACFD0-A667-4044-B644-3D445476212F}"/>
               </a:ext>
             </a:extLst>
           </p:cNvPr>
@@ -3616,7 +3616,7 @@
           <p:cNvPr id="8" name="">
             <a:extLst xmlns:a="http://schemas.openxmlformats.org/drawingml/2006/main">
               <a:ext uri="{FF2B5EF4-FFF2-40B4-BE49-F238E27FC236}">
-                <a16:creationId xmlns:a16="http://schemas.microsoft.com/office/drawing/2014/main" id="{235DE684-5A84-4A67-894E-67B85A0EF478}"/>
+                <a16:creationId xmlns:a16="http://schemas.microsoft.com/office/drawing/2014/main" id="{744B17C6-FFDB-450B-A74F-3E19A37C8FC6}"/>
               </a:ext>
             </a:extLst>
           </p:cNvPr>
@@ -3673,7 +3673,7 @@
           <p:cNvPr id="9" name="">
             <a:extLst xmlns:a="http://schemas.openxmlformats.org/drawingml/2006/main">
               <a:ext uri="{FF2B5EF4-FFF2-40B4-BE49-F238E27FC236}">
-                <a16:creationId xmlns:a16="http://schemas.microsoft.com/office/drawing/2014/main" id="{587D274A-9098-4F35-A32C-E83BB0C6941C}"/>
+                <a16:creationId xmlns:a16="http://schemas.microsoft.com/office/drawing/2014/main" id="{EB2FB165-24B2-47D3-A174-509B04CD38C3}"/>
               </a:ext>
             </a:extLst>
           </p:cNvPr>
@@ -3730,7 +3730,7 @@
           <p:cNvPr id="10" name="">
             <a:extLst xmlns:a="http://schemas.openxmlformats.org/drawingml/2006/main">
               <a:ext uri="{FF2B5EF4-FFF2-40B4-BE49-F238E27FC236}">
-                <a16:creationId xmlns:a16="http://schemas.microsoft.com/office/drawing/2014/main" id="{18DC29C2-81EE-4AD5-80CF-216ED5432D73}"/>
+                <a16:creationId xmlns:a16="http://schemas.microsoft.com/office/drawing/2014/main" id="{49F5B5CA-B099-41EE-86A2-2EE2BBF84F3F}"/>
               </a:ext>
             </a:extLst>
           </p:cNvPr>
@@ -3787,7 +3787,7 @@
           <p:cNvPr id="11" name="">
             <a:extLst xmlns:a="http://schemas.openxmlformats.org/drawingml/2006/main">
               <a:ext uri="{FF2B5EF4-FFF2-40B4-BE49-F238E27FC236}">
-                <a16:creationId xmlns:a16="http://schemas.microsoft.com/office/drawing/2014/main" id="{AF7A79E0-6D44-4897-B1B0-65C461D4DCFE}"/>
+                <a16:creationId xmlns:a16="http://schemas.microsoft.com/office/drawing/2014/main" id="{80DE60E5-59EE-4A75-B69E-BCC726FBD84B}"/>
               </a:ext>
             </a:extLst>
           </p:cNvPr>
@@ -3821,7 +3821,7 @@
           <p:cNvPr id="12" name="">
             <a:extLst xmlns:a="http://schemas.openxmlformats.org/drawingml/2006/main">
               <a:ext uri="{FF2B5EF4-FFF2-40B4-BE49-F238E27FC236}">
-                <a16:creationId xmlns:a16="http://schemas.microsoft.com/office/drawing/2014/main" id="{78AED31D-69C3-455F-B0D3-D8DCE398B5DC}"/>
+                <a16:creationId xmlns:a16="http://schemas.microsoft.com/office/drawing/2014/main" id="{D731F80D-D3A2-4DC5-A874-ECCD6B6F66A3}"/>
               </a:ext>
             </a:extLst>
           </p:cNvPr>
@@ -3878,7 +3878,7 @@
           <p:cNvPr id="13" name="">
             <a:extLst xmlns:a="http://schemas.openxmlformats.org/drawingml/2006/main">
               <a:ext uri="{FF2B5EF4-FFF2-40B4-BE49-F238E27FC236}">
-                <a16:creationId xmlns:a16="http://schemas.microsoft.com/office/drawing/2014/main" id="{4B27FBC6-2799-4FA1-BB3B-5DDAED3EA39E}"/>
+                <a16:creationId xmlns:a16="http://schemas.microsoft.com/office/drawing/2014/main" id="{F0D64AC0-8EF2-45B3-B5C0-20D49E4040DE}"/>
               </a:ext>
             </a:extLst>
           </p:cNvPr>
@@ -3935,7 +3935,7 @@
           <p:cNvPr id="14" name="">
             <a:extLst xmlns:a="http://schemas.openxmlformats.org/drawingml/2006/main">
               <a:ext uri="{FF2B5EF4-FFF2-40B4-BE49-F238E27FC236}">
-                <a16:creationId xmlns:a16="http://schemas.microsoft.com/office/drawing/2014/main" id="{EC15FDF5-9569-47B5-969F-D3396DE2AE7F}"/>
+                <a16:creationId xmlns:a16="http://schemas.microsoft.com/office/drawing/2014/main" id="{DD5E4BF5-85BD-433C-9992-086F7B019D02}"/>
               </a:ext>
             </a:extLst>
           </p:cNvPr>
@@ -3992,7 +3992,7 @@
           <p:cNvPr id="15" name="">
             <a:extLst xmlns:a="http://schemas.openxmlformats.org/drawingml/2006/main">
               <a:ext uri="{FF2B5EF4-FFF2-40B4-BE49-F238E27FC236}">
-                <a16:creationId xmlns:a16="http://schemas.microsoft.com/office/drawing/2014/main" id="{49C56E1A-52A1-498C-B58F-2701D94DFE1B}"/>
+                <a16:creationId xmlns:a16="http://schemas.microsoft.com/office/drawing/2014/main" id="{D83BFB00-2F73-4F72-AAFB-DCDA66AD0A07}"/>
               </a:ext>
             </a:extLst>
           </p:cNvPr>
@@ -4026,7 +4026,7 @@
           <p:cNvPr id="16" name="">
             <a:extLst xmlns:a="http://schemas.openxmlformats.org/drawingml/2006/main">
               <a:ext uri="{FF2B5EF4-FFF2-40B4-BE49-F238E27FC236}">
-                <a16:creationId xmlns:a16="http://schemas.microsoft.com/office/drawing/2014/main" id="{DFD75078-02DA-446B-95CA-9EB23327AA9D}"/>
+                <a16:creationId xmlns:a16="http://schemas.microsoft.com/office/drawing/2014/main" id="{FC0424EB-852D-473F-8C8F-50B60A4E9D1F}"/>
               </a:ext>
             </a:extLst>
           </p:cNvPr>
@@ -4083,7 +4083,7 @@
           <p:cNvPr id="17" name="">
             <a:extLst xmlns:a="http://schemas.openxmlformats.org/drawingml/2006/main">
               <a:ext uri="{FF2B5EF4-FFF2-40B4-BE49-F238E27FC236}">
-                <a16:creationId xmlns:a16="http://schemas.microsoft.com/office/drawing/2014/main" id="{74F1667F-304A-409B-B986-BE921C72AA08}"/>
+                <a16:creationId xmlns:a16="http://schemas.microsoft.com/office/drawing/2014/main" id="{988C2FDD-57C9-4BA2-BB52-C95693556078}"/>
               </a:ext>
             </a:extLst>
           </p:cNvPr>
@@ -4140,7 +4140,7 @@
           <p:cNvPr id="18" name="">
             <a:extLst xmlns:a="http://schemas.openxmlformats.org/drawingml/2006/main">
               <a:ext uri="{FF2B5EF4-FFF2-40B4-BE49-F238E27FC236}">
-                <a16:creationId xmlns:a16="http://schemas.microsoft.com/office/drawing/2014/main" id="{107E10BC-E2F8-4929-B677-241CCABD3976}"/>
+                <a16:creationId xmlns:a16="http://schemas.microsoft.com/office/drawing/2014/main" id="{90849041-36EE-453F-93AB-928236828C9A}"/>
               </a:ext>
             </a:extLst>
           </p:cNvPr>
@@ -4195,7 +4195,7 @@
     </p:spTree>
     <p:extLst>
       <p:ext uri="{BB962C8B-B14F-4D97-AF65-F5344CB8AC3E}">
-        <p14:creationId xmlns:p14="http://schemas.microsoft.com/office/powerpoint/2010/main" val="1231937890"/>
+        <p14:creationId xmlns:p14="http://schemas.microsoft.com/office/powerpoint/2010/main" val="656854509"/>
       </p:ext>
     </p:extLst>
   </p:cSld>
@@ -4350,7 +4350,7 @@
           <p:cNvPr id="23" name="">
             <a:extLst xmlns:a="http://schemas.openxmlformats.org/drawingml/2006/main">
               <a:ext uri="{FF2B5EF4-FFF2-40B4-BE49-F238E27FC236}">
-                <a16:creationId xmlns:a16="http://schemas.microsoft.com/office/drawing/2014/main" id="{41BC403F-5BD7-4D43-B5B9-A71075CA5DFF}"/>
+                <a16:creationId xmlns:a16="http://schemas.microsoft.com/office/drawing/2014/main" id="{BC6DC9BF-9EA5-405E-AFA4-BDABC5646775}"/>
               </a:ext>
             </a:extLst>
           </p:cNvPr>
@@ -4382,7 +4382,7 @@
           <p:cNvPr id="2" name="">
             <a:extLst xmlns:a="http://schemas.openxmlformats.org/drawingml/2006/main">
               <a:ext uri="{FF2B5EF4-FFF2-40B4-BE49-F238E27FC236}">
-                <a16:creationId xmlns:a16="http://schemas.microsoft.com/office/drawing/2014/main" id="{4FBBC7CF-9423-47B7-8F84-C688EC453A1A}"/>
+                <a16:creationId xmlns:a16="http://schemas.microsoft.com/office/drawing/2014/main" id="{E82832B7-84A1-4C51-A995-34E5EBC97550}"/>
               </a:ext>
             </a:extLst>
           </p:cNvPr>
@@ -4439,7 +4439,7 @@
           <p:cNvPr id="3" name="">
             <a:extLst xmlns:a="http://schemas.openxmlformats.org/drawingml/2006/main">
               <a:ext uri="{FF2B5EF4-FFF2-40B4-BE49-F238E27FC236}">
-                <a16:creationId xmlns:a16="http://schemas.microsoft.com/office/drawing/2014/main" id="{0A480D8C-5473-4EB0-9662-D1F642A8ADFB}"/>
+                <a16:creationId xmlns:a16="http://schemas.microsoft.com/office/drawing/2014/main" id="{BACDA666-52AF-46B1-8D16-3237EE5623C3}"/>
               </a:ext>
             </a:extLst>
           </p:cNvPr>
@@ -4471,7 +4471,7 @@
           <p:cNvPr id="4" name="">
             <a:extLst xmlns:a="http://schemas.openxmlformats.org/drawingml/2006/main">
               <a:ext uri="{FF2B5EF4-FFF2-40B4-BE49-F238E27FC236}">
-                <a16:creationId xmlns:a16="http://schemas.microsoft.com/office/drawing/2014/main" id="{183F0B0E-9DD9-42D1-A996-614A91B92B2F}"/>
+                <a16:creationId xmlns:a16="http://schemas.microsoft.com/office/drawing/2014/main" id="{EB0094D4-487D-4FB7-8584-CDC92305B9BA}"/>
               </a:ext>
             </a:extLst>
           </p:cNvPr>
@@ -4528,7 +4528,7 @@
           <p:cNvPr id="5" name="">
             <a:extLst xmlns:a="http://schemas.openxmlformats.org/drawingml/2006/main">
               <a:ext uri="{FF2B5EF4-FFF2-40B4-BE49-F238E27FC236}">
-                <a16:creationId xmlns:a16="http://schemas.microsoft.com/office/drawing/2014/main" id="{23936BF1-8937-4FE1-8FB1-B66DC9762B5F}"/>
+                <a16:creationId xmlns:a16="http://schemas.microsoft.com/office/drawing/2014/main" id="{E5010A12-4CB1-4FB3-B124-7B878BEBB67B}"/>
               </a:ext>
             </a:extLst>
           </p:cNvPr>
@@ -4585,7 +4585,7 @@
           <p:cNvPr id="6" name="">
             <a:extLst xmlns:a="http://schemas.openxmlformats.org/drawingml/2006/main">
               <a:ext uri="{FF2B5EF4-FFF2-40B4-BE49-F238E27FC236}">
-                <a16:creationId xmlns:a16="http://schemas.microsoft.com/office/drawing/2014/main" id="{C0DB3834-B349-48D3-AC4A-67632890E628}"/>
+                <a16:creationId xmlns:a16="http://schemas.microsoft.com/office/drawing/2014/main" id="{F08BF0B9-6B6E-4A00-B960-E04367DE8C3B}"/>
               </a:ext>
             </a:extLst>
           </p:cNvPr>
@@ -4642,7 +4642,7 @@
           <p:cNvPr id="7" name="">
             <a:extLst xmlns:a="http://schemas.openxmlformats.org/drawingml/2006/main">
               <a:ext uri="{FF2B5EF4-FFF2-40B4-BE49-F238E27FC236}">
-                <a16:creationId xmlns:a16="http://schemas.microsoft.com/office/drawing/2014/main" id="{6C6E9CEE-B11B-4ADE-A2C1-6709D114D075}"/>
+                <a16:creationId xmlns:a16="http://schemas.microsoft.com/office/drawing/2014/main" id="{C4865784-1070-4D7C-BA54-44373EA402C4}"/>
               </a:ext>
             </a:extLst>
           </p:cNvPr>
@@ -4674,7 +4674,7 @@
           <p:cNvPr id="8" name="">
             <a:extLst xmlns:a="http://schemas.openxmlformats.org/drawingml/2006/main">
               <a:ext uri="{FF2B5EF4-FFF2-40B4-BE49-F238E27FC236}">
-                <a16:creationId xmlns:a16="http://schemas.microsoft.com/office/drawing/2014/main" id="{0E690C86-57EC-4E24-9A48-A0CBF7F0E800}"/>
+                <a16:creationId xmlns:a16="http://schemas.microsoft.com/office/drawing/2014/main" id="{2BD04129-3BB6-4529-BBD3-BCA66E9D9A71}"/>
               </a:ext>
             </a:extLst>
           </p:cNvPr>
@@ -4731,7 +4731,7 @@
           <p:cNvPr id="9" name="">
             <a:extLst xmlns:a="http://schemas.openxmlformats.org/drawingml/2006/main">
               <a:ext uri="{FF2B5EF4-FFF2-40B4-BE49-F238E27FC236}">
-                <a16:creationId xmlns:a16="http://schemas.microsoft.com/office/drawing/2014/main" id="{2D1725F4-AAD1-4640-B74B-787F1F56E822}"/>
+                <a16:creationId xmlns:a16="http://schemas.microsoft.com/office/drawing/2014/main" id="{4202FDBE-6545-4F15-BFC9-9DC4D1603524}"/>
               </a:ext>
             </a:extLst>
           </p:cNvPr>
@@ -4788,7 +4788,7 @@
           <p:cNvPr id="10" name="">
             <a:extLst xmlns:a="http://schemas.openxmlformats.org/drawingml/2006/main">
               <a:ext uri="{FF2B5EF4-FFF2-40B4-BE49-F238E27FC236}">
-                <a16:creationId xmlns:a16="http://schemas.microsoft.com/office/drawing/2014/main" id="{E6FE3782-EC02-46EA-972D-11884B06A332}"/>
+                <a16:creationId xmlns:a16="http://schemas.microsoft.com/office/drawing/2014/main" id="{0B3AA765-A203-4A39-ADC6-20575F182862}"/>
               </a:ext>
             </a:extLst>
           </p:cNvPr>
@@ -4822,7 +4822,7 @@
           <p:cNvPr id="11" name="">
             <a:extLst xmlns:a="http://schemas.openxmlformats.org/drawingml/2006/main">
               <a:ext uri="{FF2B5EF4-FFF2-40B4-BE49-F238E27FC236}">
-                <a16:creationId xmlns:a16="http://schemas.microsoft.com/office/drawing/2014/main" id="{08F402C1-6FE8-4486-B311-AE2F1E755E62}"/>
+                <a16:creationId xmlns:a16="http://schemas.microsoft.com/office/drawing/2014/main" id="{C9C843A8-7E9B-487E-BA4E-AFA76AF8322A}"/>
               </a:ext>
             </a:extLst>
           </p:cNvPr>
@@ -4854,7 +4854,7 @@
           <p:cNvPr id="12" name="">
             <a:extLst xmlns:a="http://schemas.openxmlformats.org/drawingml/2006/main">
               <a:ext uri="{FF2B5EF4-FFF2-40B4-BE49-F238E27FC236}">
-                <a16:creationId xmlns:a16="http://schemas.microsoft.com/office/drawing/2014/main" id="{B500DF2E-96C6-4A50-866B-B6FCA7391CE2}"/>
+                <a16:creationId xmlns:a16="http://schemas.microsoft.com/office/drawing/2014/main" id="{9E1EF033-F566-4056-8965-7B899BAF4C03}"/>
               </a:ext>
             </a:extLst>
           </p:cNvPr>
@@ -4911,7 +4911,7 @@
           <p:cNvPr id="13" name="">
             <a:extLst xmlns:a="http://schemas.openxmlformats.org/drawingml/2006/main">
               <a:ext uri="{FF2B5EF4-FFF2-40B4-BE49-F238E27FC236}">
-                <a16:creationId xmlns:a16="http://schemas.microsoft.com/office/drawing/2014/main" id="{461854AC-3E22-4F17-A601-22FF4E2FA6FF}"/>
+                <a16:creationId xmlns:a16="http://schemas.microsoft.com/office/drawing/2014/main" id="{7FF41D50-1491-4FC9-AC47-BF70DEAC14EA}"/>
               </a:ext>
             </a:extLst>
           </p:cNvPr>
@@ -4968,7 +4968,7 @@
           <p:cNvPr id="14" name="">
             <a:extLst xmlns:a="http://schemas.openxmlformats.org/drawingml/2006/main">
               <a:ext uri="{FF2B5EF4-FFF2-40B4-BE49-F238E27FC236}">
-                <a16:creationId xmlns:a16="http://schemas.microsoft.com/office/drawing/2014/main" id="{81BE2880-D4FF-479E-BB7F-C644684DC6EB}"/>
+                <a16:creationId xmlns:a16="http://schemas.microsoft.com/office/drawing/2014/main" id="{3DBC0A56-1ECC-4243-A906-F925925E5518}"/>
               </a:ext>
             </a:extLst>
           </p:cNvPr>
@@ -5002,7 +5002,7 @@
           <p:cNvPr id="15" name="">
             <a:extLst xmlns:a="http://schemas.openxmlformats.org/drawingml/2006/main">
               <a:ext uri="{FF2B5EF4-FFF2-40B4-BE49-F238E27FC236}">
-                <a16:creationId xmlns:a16="http://schemas.microsoft.com/office/drawing/2014/main" id="{300976D9-5909-4721-9AE7-F5038A9AF892}"/>
+                <a16:creationId xmlns:a16="http://schemas.microsoft.com/office/drawing/2014/main" id="{E1E44E68-08A7-4871-92D1-EA987BBCBDF3}"/>
               </a:ext>
             </a:extLst>
           </p:cNvPr>
@@ -5034,7 +5034,7 @@
           <p:cNvPr id="16" name="">
             <a:extLst xmlns:a="http://schemas.openxmlformats.org/drawingml/2006/main">
               <a:ext uri="{FF2B5EF4-FFF2-40B4-BE49-F238E27FC236}">
-                <a16:creationId xmlns:a16="http://schemas.microsoft.com/office/drawing/2014/main" id="{74621571-279E-47E8-91A8-8652C3355600}"/>
+                <a16:creationId xmlns:a16="http://schemas.microsoft.com/office/drawing/2014/main" id="{8A9FA5D1-B28A-4187-A67F-A7A05772AC27}"/>
               </a:ext>
             </a:extLst>
           </p:cNvPr>
@@ -5091,7 +5091,7 @@
           <p:cNvPr id="17" name="">
             <a:extLst xmlns:a="http://schemas.openxmlformats.org/drawingml/2006/main">
               <a:ext uri="{FF2B5EF4-FFF2-40B4-BE49-F238E27FC236}">
-                <a16:creationId xmlns:a16="http://schemas.microsoft.com/office/drawing/2014/main" id="{7FE84161-E1BB-4F9A-9395-5CDDF13830CF}"/>
+                <a16:creationId xmlns:a16="http://schemas.microsoft.com/office/drawing/2014/main" id="{11ACCA52-959A-4130-BFB1-E2A22046843F}"/>
               </a:ext>
             </a:extLst>
           </p:cNvPr>
@@ -5148,7 +5148,7 @@
           <p:cNvPr id="18" name="">
             <a:extLst xmlns:a="http://schemas.openxmlformats.org/drawingml/2006/main">
               <a:ext uri="{FF2B5EF4-FFF2-40B4-BE49-F238E27FC236}">
-                <a16:creationId xmlns:a16="http://schemas.microsoft.com/office/drawing/2014/main" id="{5CE32AF9-47F4-42A0-9FE1-9A43588F2E5F}"/>
+                <a16:creationId xmlns:a16="http://schemas.microsoft.com/office/drawing/2014/main" id="{CC2E1109-C85F-4921-B6A2-7F9005EE7C5E}"/>
               </a:ext>
             </a:extLst>
           </p:cNvPr>
@@ -5182,7 +5182,7 @@
           <p:cNvPr id="19" name="">
             <a:extLst xmlns:a="http://schemas.openxmlformats.org/drawingml/2006/main">
               <a:ext uri="{FF2B5EF4-FFF2-40B4-BE49-F238E27FC236}">
-                <a16:creationId xmlns:a16="http://schemas.microsoft.com/office/drawing/2014/main" id="{7408D1E4-F338-45E0-9797-588ACFD753D3}"/>
+                <a16:creationId xmlns:a16="http://schemas.microsoft.com/office/drawing/2014/main" id="{C013FA4F-3FB3-444F-93BC-C22978638F8B}"/>
               </a:ext>
             </a:extLst>
           </p:cNvPr>
@@ -5214,7 +5214,7 @@
           <p:cNvPr id="20" name="">
             <a:extLst xmlns:a="http://schemas.openxmlformats.org/drawingml/2006/main">
               <a:ext uri="{FF2B5EF4-FFF2-40B4-BE49-F238E27FC236}">
-                <a16:creationId xmlns:a16="http://schemas.microsoft.com/office/drawing/2014/main" id="{E97342D4-FA8A-4980-A4AF-BD4196DB187E}"/>
+                <a16:creationId xmlns:a16="http://schemas.microsoft.com/office/drawing/2014/main" id="{172E1DA5-9789-4392-8D76-91E5446BA32B}"/>
               </a:ext>
             </a:extLst>
           </p:cNvPr>
@@ -5271,7 +5271,7 @@
           <p:cNvPr id="21" name="">
             <a:extLst xmlns:a="http://schemas.openxmlformats.org/drawingml/2006/main">
               <a:ext uri="{FF2B5EF4-FFF2-40B4-BE49-F238E27FC236}">
-                <a16:creationId xmlns:a16="http://schemas.microsoft.com/office/drawing/2014/main" id="{3FB3DDB4-47FD-4FFF-9FC1-F4D9BBDACB04}"/>
+                <a16:creationId xmlns:a16="http://schemas.microsoft.com/office/drawing/2014/main" id="{6A76C4A3-CF12-42AB-9D97-B02E49423FBE}"/>
               </a:ext>
             </a:extLst>
           </p:cNvPr>
@@ -5328,7 +5328,7 @@
           <p:cNvPr id="22" name="">
             <a:extLst xmlns:a="http://schemas.openxmlformats.org/drawingml/2006/main">
               <a:ext uri="{FF2B5EF4-FFF2-40B4-BE49-F238E27FC236}">
-                <a16:creationId xmlns:a16="http://schemas.microsoft.com/office/drawing/2014/main" id="{4FE57CAB-3C91-4573-B88F-0B32D55E4751}"/>
+                <a16:creationId xmlns:a16="http://schemas.microsoft.com/office/drawing/2014/main" id="{E9D88DD7-CF37-488D-B18E-BFBF0E6DAF74}"/>
               </a:ext>
             </a:extLst>
           </p:cNvPr>
@@ -5383,7 +5383,7 @@
     </p:spTree>
     <p:extLst>
       <p:ext uri="{BB962C8B-B14F-4D97-AF65-F5344CB8AC3E}">
-        <p14:creationId xmlns:p14="http://schemas.microsoft.com/office/powerpoint/2010/main" val="1594454070"/>
+        <p14:creationId xmlns:p14="http://schemas.microsoft.com/office/powerpoint/2010/main" val="327227814"/>
       </p:ext>
     </p:extLst>
   </p:cSld>
@@ -5584,7 +5584,7 @@
           <p:cNvPr id="23" name="">
             <a:extLst xmlns:a="http://schemas.openxmlformats.org/drawingml/2006/main">
               <a:ext uri="{FF2B5EF4-FFF2-40B4-BE49-F238E27FC236}">
-                <a16:creationId xmlns:a16="http://schemas.microsoft.com/office/drawing/2014/main" id="{A92C0CD5-8AA2-4197-B6ED-DF2C22877642}"/>
+                <a16:creationId xmlns:a16="http://schemas.microsoft.com/office/drawing/2014/main" id="{271313C5-2502-4786-B6F7-ADDED99BFC09}"/>
               </a:ext>
             </a:extLst>
           </p:cNvPr>
@@ -5616,7 +5616,7 @@
           <p:cNvPr id="2" name="">
             <a:extLst xmlns:a="http://schemas.openxmlformats.org/drawingml/2006/main">
               <a:ext uri="{FF2B5EF4-FFF2-40B4-BE49-F238E27FC236}">
-                <a16:creationId xmlns:a16="http://schemas.microsoft.com/office/drawing/2014/main" id="{DF6771CC-47EA-4357-ADC6-3B366B195D81}"/>
+                <a16:creationId xmlns:a16="http://schemas.microsoft.com/office/drawing/2014/main" id="{C67DFB60-9C48-41E1-A53C-DA1D95127616}"/>
               </a:ext>
             </a:extLst>
           </p:cNvPr>
@@ -5673,7 +5673,7 @@
           <p:cNvPr id="3" name="">
             <a:extLst xmlns:a="http://schemas.openxmlformats.org/drawingml/2006/main">
               <a:ext uri="{FF2B5EF4-FFF2-40B4-BE49-F238E27FC236}">
-                <a16:creationId xmlns:a16="http://schemas.microsoft.com/office/drawing/2014/main" id="{E2CF9642-C357-49F2-86D1-7E9279030346}"/>
+                <a16:creationId xmlns:a16="http://schemas.microsoft.com/office/drawing/2014/main" id="{A0EE613C-2D78-466E-BB66-4690127F733E}"/>
               </a:ext>
             </a:extLst>
           </p:cNvPr>
@@ -5705,7 +5705,7 @@
           <p:cNvPr id="4" name="">
             <a:extLst xmlns:a="http://schemas.openxmlformats.org/drawingml/2006/main">
               <a:ext uri="{FF2B5EF4-FFF2-40B4-BE49-F238E27FC236}">
-                <a16:creationId xmlns:a16="http://schemas.microsoft.com/office/drawing/2014/main" id="{21188497-B4DD-4171-9511-3D1B93B0BD2E}"/>
+                <a16:creationId xmlns:a16="http://schemas.microsoft.com/office/drawing/2014/main" id="{52E09DD0-5068-4D2F-947C-AC39556ACE77}"/>
               </a:ext>
             </a:extLst>
           </p:cNvPr>
@@ -5762,7 +5762,7 @@
           <p:cNvPr id="5" name="">
             <a:extLst xmlns:a="http://schemas.openxmlformats.org/drawingml/2006/main">
               <a:ext uri="{FF2B5EF4-FFF2-40B4-BE49-F238E27FC236}">
-                <a16:creationId xmlns:a16="http://schemas.microsoft.com/office/drawing/2014/main" id="{BC2DB6BD-69E5-43E8-B5E8-EBEE0047E2EC}"/>
+                <a16:creationId xmlns:a16="http://schemas.microsoft.com/office/drawing/2014/main" id="{7A2A6B12-590C-4AC8-8EA8-F79FFC6C1AA0}"/>
               </a:ext>
             </a:extLst>
           </p:cNvPr>
@@ -5819,7 +5819,7 @@
           <p:cNvPr id="6" name="">
             <a:extLst xmlns:a="http://schemas.openxmlformats.org/drawingml/2006/main">
               <a:ext uri="{FF2B5EF4-FFF2-40B4-BE49-F238E27FC236}">
-                <a16:creationId xmlns:a16="http://schemas.microsoft.com/office/drawing/2014/main" id="{0150EF69-D489-4619-9BB6-3605561A98A7}"/>
+                <a16:creationId xmlns:a16="http://schemas.microsoft.com/office/drawing/2014/main" id="{E8BD0A0C-22EC-4055-B7F4-2D7073E3B869}"/>
               </a:ext>
             </a:extLst>
           </p:cNvPr>
@@ -5876,7 +5876,7 @@
           <p:cNvPr id="7" name="">
             <a:extLst xmlns:a="http://schemas.openxmlformats.org/drawingml/2006/main">
               <a:ext uri="{FF2B5EF4-FFF2-40B4-BE49-F238E27FC236}">
-                <a16:creationId xmlns:a16="http://schemas.microsoft.com/office/drawing/2014/main" id="{971126E0-E7A2-461F-B45C-40FA57AF580A}"/>
+                <a16:creationId xmlns:a16="http://schemas.microsoft.com/office/drawing/2014/main" id="{AC21637A-E909-426D-A96D-B694EBFBCB23}"/>
               </a:ext>
             </a:extLst>
           </p:cNvPr>
@@ -5908,7 +5908,7 @@
           <p:cNvPr id="8" name="">
             <a:extLst xmlns:a="http://schemas.openxmlformats.org/drawingml/2006/main">
               <a:ext uri="{FF2B5EF4-FFF2-40B4-BE49-F238E27FC236}">
-                <a16:creationId xmlns:a16="http://schemas.microsoft.com/office/drawing/2014/main" id="{252CFBE4-88FF-42E4-A918-D7144E4ABF47}"/>
+                <a16:creationId xmlns:a16="http://schemas.microsoft.com/office/drawing/2014/main" id="{7EEE2CA6-899E-48D8-BAB1-55C29E503DCE}"/>
               </a:ext>
             </a:extLst>
           </p:cNvPr>
@@ -5965,7 +5965,7 @@
           <p:cNvPr id="9" name="">
             <a:extLst xmlns:a="http://schemas.openxmlformats.org/drawingml/2006/main">
               <a:ext uri="{FF2B5EF4-FFF2-40B4-BE49-F238E27FC236}">
-                <a16:creationId xmlns:a16="http://schemas.microsoft.com/office/drawing/2014/main" id="{63869A91-228D-4865-A71D-2D11FC1432DC}"/>
+                <a16:creationId xmlns:a16="http://schemas.microsoft.com/office/drawing/2014/main" id="{4C851AAD-2D54-404C-8DD9-0D839012BCF0}"/>
               </a:ext>
             </a:extLst>
           </p:cNvPr>
@@ -6022,7 +6022,7 @@
           <p:cNvPr id="10" name="">
             <a:extLst xmlns:a="http://schemas.openxmlformats.org/drawingml/2006/main">
               <a:ext uri="{FF2B5EF4-FFF2-40B4-BE49-F238E27FC236}">
-                <a16:creationId xmlns:a16="http://schemas.microsoft.com/office/drawing/2014/main" id="{ED3BB172-18AF-47D8-905F-551FB642EBB3}"/>
+                <a16:creationId xmlns:a16="http://schemas.microsoft.com/office/drawing/2014/main" id="{4E908EB0-5756-4026-B02D-BD3B0835FDFB}"/>
               </a:ext>
             </a:extLst>
           </p:cNvPr>
@@ -6056,7 +6056,7 @@
           <p:cNvPr id="11" name="">
             <a:extLst xmlns:a="http://schemas.openxmlformats.org/drawingml/2006/main">
               <a:ext uri="{FF2B5EF4-FFF2-40B4-BE49-F238E27FC236}">
-                <a16:creationId xmlns:a16="http://schemas.microsoft.com/office/drawing/2014/main" id="{2B2F030C-9A17-4E77-8D6A-4012C0BA4A12}"/>
+                <a16:creationId xmlns:a16="http://schemas.microsoft.com/office/drawing/2014/main" id="{E09DAA30-4E35-424B-8D43-6D87F4200BB7}"/>
               </a:ext>
             </a:extLst>
           </p:cNvPr>
@@ -6088,7 +6088,7 @@
           <p:cNvPr id="12" name="">
             <a:extLst xmlns:a="http://schemas.openxmlformats.org/drawingml/2006/main">
               <a:ext uri="{FF2B5EF4-FFF2-40B4-BE49-F238E27FC236}">
-                <a16:creationId xmlns:a16="http://schemas.microsoft.com/office/drawing/2014/main" id="{CA0D51A2-DB15-4528-8DE4-B5B302F9AE1B}"/>
+                <a16:creationId xmlns:a16="http://schemas.microsoft.com/office/drawing/2014/main" id="{6DF203EC-62AE-49B4-A1BD-E690E2D2B2A5}"/>
               </a:ext>
             </a:extLst>
           </p:cNvPr>
@@ -6145,7 +6145,7 @@
           <p:cNvPr id="13" name="">
             <a:extLst xmlns:a="http://schemas.openxmlformats.org/drawingml/2006/main">
               <a:ext uri="{FF2B5EF4-FFF2-40B4-BE49-F238E27FC236}">
-                <a16:creationId xmlns:a16="http://schemas.microsoft.com/office/drawing/2014/main" id="{155C7804-A925-4381-95D4-297C5FC621BC}"/>
+                <a16:creationId xmlns:a16="http://schemas.microsoft.com/office/drawing/2014/main" id="{97FB01DD-F0D0-45DF-A1A6-F3B4431AB2F6}"/>
               </a:ext>
             </a:extLst>
           </p:cNvPr>
@@ -6202,7 +6202,7 @@
           <p:cNvPr id="14" name="">
             <a:extLst xmlns:a="http://schemas.openxmlformats.org/drawingml/2006/main">
               <a:ext uri="{FF2B5EF4-FFF2-40B4-BE49-F238E27FC236}">
-                <a16:creationId xmlns:a16="http://schemas.microsoft.com/office/drawing/2014/main" id="{5CADF8A0-A477-41BE-8B6E-84AEA0EAAF18}"/>
+                <a16:creationId xmlns:a16="http://schemas.microsoft.com/office/drawing/2014/main" id="{47EFD57E-414B-4441-83C5-2C925D5EC87A}"/>
               </a:ext>
             </a:extLst>
           </p:cNvPr>
@@ -6236,7 +6236,7 @@
           <p:cNvPr id="15" name="">
             <a:extLst xmlns:a="http://schemas.openxmlformats.org/drawingml/2006/main">
               <a:ext uri="{FF2B5EF4-FFF2-40B4-BE49-F238E27FC236}">
-                <a16:creationId xmlns:a16="http://schemas.microsoft.com/office/drawing/2014/main" id="{44FC8774-B528-4019-BA4E-CB2D25763371}"/>
+                <a16:creationId xmlns:a16="http://schemas.microsoft.com/office/drawing/2014/main" id="{29A4CCD7-403F-431A-9A65-EB3FB0E38960}"/>
               </a:ext>
             </a:extLst>
           </p:cNvPr>
@@ -6268,7 +6268,7 @@
           <p:cNvPr id="16" name="">
             <a:extLst xmlns:a="http://schemas.openxmlformats.org/drawingml/2006/main">
               <a:ext uri="{FF2B5EF4-FFF2-40B4-BE49-F238E27FC236}">
-                <a16:creationId xmlns:a16="http://schemas.microsoft.com/office/drawing/2014/main" id="{17459C7F-56B7-4DF7-A451-8CA5E286789B}"/>
+                <a16:creationId xmlns:a16="http://schemas.microsoft.com/office/drawing/2014/main" id="{39D2862C-344A-48D6-AE2D-8F870E67521C}"/>
               </a:ext>
             </a:extLst>
           </p:cNvPr>
@@ -6325,7 +6325,7 @@
           <p:cNvPr id="17" name="">
             <a:extLst xmlns:a="http://schemas.openxmlformats.org/drawingml/2006/main">
               <a:ext uri="{FF2B5EF4-FFF2-40B4-BE49-F238E27FC236}">
-                <a16:creationId xmlns:a16="http://schemas.microsoft.com/office/drawing/2014/main" id="{76C45F38-D204-4879-AE23-C96AC5AC362D}"/>
+                <a16:creationId xmlns:a16="http://schemas.microsoft.com/office/drawing/2014/main" id="{27E404C4-774F-47B3-BD59-AB5175DFD965}"/>
               </a:ext>
             </a:extLst>
           </p:cNvPr>
@@ -6382,7 +6382,7 @@
           <p:cNvPr id="18" name="">
             <a:extLst xmlns:a="http://schemas.openxmlformats.org/drawingml/2006/main">
               <a:ext uri="{FF2B5EF4-FFF2-40B4-BE49-F238E27FC236}">
-                <a16:creationId xmlns:a16="http://schemas.microsoft.com/office/drawing/2014/main" id="{E9F190AA-01E8-449C-B087-EEFF86BD8DA7}"/>
+                <a16:creationId xmlns:a16="http://schemas.microsoft.com/office/drawing/2014/main" id="{4091E0DA-7E28-4734-B037-1B216652AFCC}"/>
               </a:ext>
             </a:extLst>
           </p:cNvPr>
@@ -6416,7 +6416,7 @@
           <p:cNvPr id="19" name="">
             <a:extLst xmlns:a="http://schemas.openxmlformats.org/drawingml/2006/main">
               <a:ext uri="{FF2B5EF4-FFF2-40B4-BE49-F238E27FC236}">
-                <a16:creationId xmlns:a16="http://schemas.microsoft.com/office/drawing/2014/main" id="{60934620-8164-4A9C-897A-E4E313181EF3}"/>
+                <a16:creationId xmlns:a16="http://schemas.microsoft.com/office/drawing/2014/main" id="{23613E98-2A95-417E-838A-9AA71D155D67}"/>
               </a:ext>
             </a:extLst>
           </p:cNvPr>
@@ -6448,7 +6448,7 @@
           <p:cNvPr id="20" name="">
             <a:extLst xmlns:a="http://schemas.openxmlformats.org/drawingml/2006/main">
               <a:ext uri="{FF2B5EF4-FFF2-40B4-BE49-F238E27FC236}">
-                <a16:creationId xmlns:a16="http://schemas.microsoft.com/office/drawing/2014/main" id="{41F87B63-9599-4899-B959-18815EC1ACB1}"/>
+                <a16:creationId xmlns:a16="http://schemas.microsoft.com/office/drawing/2014/main" id="{729F3970-2AC5-4BC8-ADDF-BAB53AF47BA2}"/>
               </a:ext>
             </a:extLst>
           </p:cNvPr>
@@ -6505,7 +6505,7 @@
           <p:cNvPr id="21" name="">
             <a:extLst xmlns:a="http://schemas.openxmlformats.org/drawingml/2006/main">
               <a:ext uri="{FF2B5EF4-FFF2-40B4-BE49-F238E27FC236}">
-                <a16:creationId xmlns:a16="http://schemas.microsoft.com/office/drawing/2014/main" id="{B0119996-D63E-4325-B9D5-F539607CEE9B}"/>
+                <a16:creationId xmlns:a16="http://schemas.microsoft.com/office/drawing/2014/main" id="{7DF5962D-1941-4D36-9A90-F2F0988DDCC4}"/>
               </a:ext>
             </a:extLst>
           </p:cNvPr>
@@ -6562,7 +6562,7 @@
           <p:cNvPr id="22" name="">
             <a:extLst xmlns:a="http://schemas.openxmlformats.org/drawingml/2006/main">
               <a:ext uri="{FF2B5EF4-FFF2-40B4-BE49-F238E27FC236}">
-                <a16:creationId xmlns:a16="http://schemas.microsoft.com/office/drawing/2014/main" id="{D8D3C0FD-9F44-40B5-8358-DFD18D536269}"/>
+                <a16:creationId xmlns:a16="http://schemas.microsoft.com/office/drawing/2014/main" id="{D251A13F-4F7D-4D06-8265-97303E07245B}"/>
               </a:ext>
             </a:extLst>
           </p:cNvPr>
@@ -6617,7 +6617,7 @@
     </p:spTree>
     <p:extLst>
       <p:ext uri="{BB962C8B-B14F-4D97-AF65-F5344CB8AC3E}">
-        <p14:creationId xmlns:p14="http://schemas.microsoft.com/office/powerpoint/2010/main" val="1184523044"/>
+        <p14:creationId xmlns:p14="http://schemas.microsoft.com/office/powerpoint/2010/main" val="994817594"/>
       </p:ext>
     </p:extLst>
   </p:cSld>
@@ -6818,7 +6818,7 @@
           <p:cNvPr id="16" name="">
             <a:extLst xmlns:a="http://schemas.openxmlformats.org/drawingml/2006/main">
               <a:ext uri="{FF2B5EF4-FFF2-40B4-BE49-F238E27FC236}">
-                <a16:creationId xmlns:a16="http://schemas.microsoft.com/office/drawing/2014/main" id="{B4BF7611-9FB0-4C54-A9F2-DD645DFCE8AA}"/>
+                <a16:creationId xmlns:a16="http://schemas.microsoft.com/office/drawing/2014/main" id="{365EC4F3-B07B-4075-A1E0-2F1F031D9A25}"/>
               </a:ext>
             </a:extLst>
           </p:cNvPr>
@@ -6850,7 +6850,7 @@
           <p:cNvPr id="2" name="">
             <a:extLst xmlns:a="http://schemas.openxmlformats.org/drawingml/2006/main">
               <a:ext uri="{FF2B5EF4-FFF2-40B4-BE49-F238E27FC236}">
-                <a16:creationId xmlns:a16="http://schemas.microsoft.com/office/drawing/2014/main" id="{ADABDDF4-9FED-4E91-BC2B-566F5FB0C130}"/>
+                <a16:creationId xmlns:a16="http://schemas.microsoft.com/office/drawing/2014/main" id="{4464FBF5-3C92-487C-9581-54A08B7751DC}"/>
               </a:ext>
             </a:extLst>
           </p:cNvPr>
@@ -6907,7 +6907,7 @@
           <p:cNvPr id="3" name="">
             <a:extLst xmlns:a="http://schemas.openxmlformats.org/drawingml/2006/main">
               <a:ext uri="{FF2B5EF4-FFF2-40B4-BE49-F238E27FC236}">
-                <a16:creationId xmlns:a16="http://schemas.microsoft.com/office/drawing/2014/main" id="{7C8BBB8D-051E-4438-984B-E451FF7173D6}"/>
+                <a16:creationId xmlns:a16="http://schemas.microsoft.com/office/drawing/2014/main" id="{027B06AD-1805-42CE-8B4B-C048A3D9AF1A}"/>
               </a:ext>
             </a:extLst>
           </p:cNvPr>
@@ -6939,7 +6939,7 @@
           <p:cNvPr id="4" name="">
             <a:extLst xmlns:a="http://schemas.openxmlformats.org/drawingml/2006/main">
               <a:ext uri="{FF2B5EF4-FFF2-40B4-BE49-F238E27FC236}">
-                <a16:creationId xmlns:a16="http://schemas.microsoft.com/office/drawing/2014/main" id="{63AF7ACB-7C09-40B0-8291-6CF0FAC2DF14}"/>
+                <a16:creationId xmlns:a16="http://schemas.microsoft.com/office/drawing/2014/main" id="{09EC7A9D-BFD0-4492-B5C4-028935D888E3}"/>
               </a:ext>
             </a:extLst>
           </p:cNvPr>
@@ -6996,7 +6996,7 @@
           <p:cNvPr id="5" name="">
             <a:extLst xmlns:a="http://schemas.openxmlformats.org/drawingml/2006/main">
               <a:ext uri="{FF2B5EF4-FFF2-40B4-BE49-F238E27FC236}">
-                <a16:creationId xmlns:a16="http://schemas.microsoft.com/office/drawing/2014/main" id="{0B80F6E0-A65F-471A-B351-96B396B85536}"/>
+                <a16:creationId xmlns:a16="http://schemas.microsoft.com/office/drawing/2014/main" id="{80502F54-8428-4FB2-BAAB-B75D12F259D8}"/>
               </a:ext>
             </a:extLst>
           </p:cNvPr>
@@ -7053,7 +7053,7 @@
           <p:cNvPr id="6" name="">
             <a:extLst xmlns:a="http://schemas.openxmlformats.org/drawingml/2006/main">
               <a:ext uri="{FF2B5EF4-FFF2-40B4-BE49-F238E27FC236}">
-                <a16:creationId xmlns:a16="http://schemas.microsoft.com/office/drawing/2014/main" id="{3026BD7C-1F44-4551-9F8A-B1F089D9BE2F}"/>
+                <a16:creationId xmlns:a16="http://schemas.microsoft.com/office/drawing/2014/main" id="{797D2FD1-B244-4DAC-AB0D-40C37CD2F478}"/>
               </a:ext>
             </a:extLst>
           </p:cNvPr>
@@ -7110,7 +7110,7 @@
           <p:cNvPr id="7" name="">
             <a:extLst xmlns:a="http://schemas.openxmlformats.org/drawingml/2006/main">
               <a:ext uri="{FF2B5EF4-FFF2-40B4-BE49-F238E27FC236}">
-                <a16:creationId xmlns:a16="http://schemas.microsoft.com/office/drawing/2014/main" id="{37DE650E-D027-4938-B433-0B3C8D1EF765}"/>
+                <a16:creationId xmlns:a16="http://schemas.microsoft.com/office/drawing/2014/main" id="{2E223A9B-B938-419E-A708-7D90F170F668}"/>
               </a:ext>
             </a:extLst>
           </p:cNvPr>
@@ -7142,7 +7142,7 @@
           <p:cNvPr id="8" name="">
             <a:extLst xmlns:a="http://schemas.openxmlformats.org/drawingml/2006/main">
               <a:ext uri="{FF2B5EF4-FFF2-40B4-BE49-F238E27FC236}">
-                <a16:creationId xmlns:a16="http://schemas.microsoft.com/office/drawing/2014/main" id="{D1565057-C5A7-4FA9-8A3E-E1EAC116DFB7}"/>
+                <a16:creationId xmlns:a16="http://schemas.microsoft.com/office/drawing/2014/main" id="{1A6B713D-3D8F-4500-949C-E43175519254}"/>
               </a:ext>
             </a:extLst>
           </p:cNvPr>
@@ -7199,7 +7199,7 @@
           <p:cNvPr id="9" name="">
             <a:extLst xmlns:a="http://schemas.openxmlformats.org/drawingml/2006/main">
               <a:ext uri="{FF2B5EF4-FFF2-40B4-BE49-F238E27FC236}">
-                <a16:creationId xmlns:a16="http://schemas.microsoft.com/office/drawing/2014/main" id="{90242136-9DF8-425E-A966-35B323FAEBD0}"/>
+                <a16:creationId xmlns:a16="http://schemas.microsoft.com/office/drawing/2014/main" id="{F12048E0-F073-4D6E-96C7-399A2C1DDE60}"/>
               </a:ext>
             </a:extLst>
           </p:cNvPr>
@@ -7256,7 +7256,7 @@
           <p:cNvPr id="10" name="">
             <a:extLst xmlns:a="http://schemas.openxmlformats.org/drawingml/2006/main">
               <a:ext uri="{FF2B5EF4-FFF2-40B4-BE49-F238E27FC236}">
-                <a16:creationId xmlns:a16="http://schemas.microsoft.com/office/drawing/2014/main" id="{C9AB95AF-9303-48F6-9AEC-C2FCC17ED9A5}"/>
+                <a16:creationId xmlns:a16="http://schemas.microsoft.com/office/drawing/2014/main" id="{4EBF8AC3-3DD8-4CB2-B0D5-09D54508DB92}"/>
               </a:ext>
             </a:extLst>
           </p:cNvPr>
@@ -7313,7 +7313,7 @@
           <p:cNvPr id="11" name="">
             <a:extLst xmlns:a="http://schemas.openxmlformats.org/drawingml/2006/main">
               <a:ext uri="{FF2B5EF4-FFF2-40B4-BE49-F238E27FC236}">
-                <a16:creationId xmlns:a16="http://schemas.microsoft.com/office/drawing/2014/main" id="{B52529D1-C048-4BB0-BA8B-6CC66D7B22B5}"/>
+                <a16:creationId xmlns:a16="http://schemas.microsoft.com/office/drawing/2014/main" id="{744FB95D-5A60-45C1-A8F8-E9A05E3B76F1}"/>
               </a:ext>
             </a:extLst>
           </p:cNvPr>
@@ -7345,7 +7345,7 @@
           <p:cNvPr id="12" name="">
             <a:extLst xmlns:a="http://schemas.openxmlformats.org/drawingml/2006/main">
               <a:ext uri="{FF2B5EF4-FFF2-40B4-BE49-F238E27FC236}">
-                <a16:creationId xmlns:a16="http://schemas.microsoft.com/office/drawing/2014/main" id="{810A3AA9-1025-4EA0-8E13-5FCD891150C8}"/>
+                <a16:creationId xmlns:a16="http://schemas.microsoft.com/office/drawing/2014/main" id="{D913FDA6-80EA-45FE-9E77-77B2F814AC5A}"/>
               </a:ext>
             </a:extLst>
           </p:cNvPr>
@@ -7402,7 +7402,7 @@
           <p:cNvPr id="13" name="">
             <a:extLst xmlns:a="http://schemas.openxmlformats.org/drawingml/2006/main">
               <a:ext uri="{FF2B5EF4-FFF2-40B4-BE49-F238E27FC236}">
-                <a16:creationId xmlns:a16="http://schemas.microsoft.com/office/drawing/2014/main" id="{31DAC58F-8EC2-4EE8-835D-BCE6A9CE0C64}"/>
+                <a16:creationId xmlns:a16="http://schemas.microsoft.com/office/drawing/2014/main" id="{84131C18-E108-499F-A606-7F5259D83F22}"/>
               </a:ext>
             </a:extLst>
           </p:cNvPr>
@@ -7459,7 +7459,7 @@
           <p:cNvPr id="14" name="">
             <a:extLst xmlns:a="http://schemas.openxmlformats.org/drawingml/2006/main">
               <a:ext uri="{FF2B5EF4-FFF2-40B4-BE49-F238E27FC236}">
-                <a16:creationId xmlns:a16="http://schemas.microsoft.com/office/drawing/2014/main" id="{CF36A771-F87A-4B46-AE4B-63734C7847A2}"/>
+                <a16:creationId xmlns:a16="http://schemas.microsoft.com/office/drawing/2014/main" id="{66E6154B-0C19-4B76-9063-17C8CF3AA076}"/>
               </a:ext>
             </a:extLst>
           </p:cNvPr>
@@ -7516,7 +7516,7 @@
           <p:cNvPr id="15" name="">
             <a:extLst xmlns:a="http://schemas.openxmlformats.org/drawingml/2006/main">
               <a:ext uri="{FF2B5EF4-FFF2-40B4-BE49-F238E27FC236}">
-                <a16:creationId xmlns:a16="http://schemas.microsoft.com/office/drawing/2014/main" id="{0BF5EBBF-4C2F-46D5-A5F0-89B8C69B6453}"/>
+                <a16:creationId xmlns:a16="http://schemas.microsoft.com/office/drawing/2014/main" id="{773D2ACE-CDCD-4219-9CA3-8F6681145B93}"/>
               </a:ext>
             </a:extLst>
           </p:cNvPr>
@@ -7571,7 +7571,7 @@
     </p:spTree>
     <p:extLst>
       <p:ext uri="{BB962C8B-B14F-4D97-AF65-F5344CB8AC3E}">
-        <p14:creationId xmlns:p14="http://schemas.microsoft.com/office/powerpoint/2010/main" val="503982838"/>
+        <p14:creationId xmlns:p14="http://schemas.microsoft.com/office/powerpoint/2010/main" val="2050205374"/>
       </p:ext>
     </p:extLst>
   </p:cSld>
@@ -7772,7 +7772,7 @@
           <p:cNvPr id="23" name="">
             <a:extLst xmlns:a="http://schemas.openxmlformats.org/drawingml/2006/main">
               <a:ext uri="{FF2B5EF4-FFF2-40B4-BE49-F238E27FC236}">
-                <a16:creationId xmlns:a16="http://schemas.microsoft.com/office/drawing/2014/main" id="{A8AC3ED2-0067-4F0E-842C-DF65D8E26BA6}"/>
+                <a16:creationId xmlns:a16="http://schemas.microsoft.com/office/drawing/2014/main" id="{D03C82E0-2242-4BD6-9537-AE58AEA19561}"/>
               </a:ext>
             </a:extLst>
           </p:cNvPr>
@@ -7804,7 +7804,7 @@
           <p:cNvPr id="2" name="">
             <a:extLst xmlns:a="http://schemas.openxmlformats.org/drawingml/2006/main">
               <a:ext uri="{FF2B5EF4-FFF2-40B4-BE49-F238E27FC236}">
-                <a16:creationId xmlns:a16="http://schemas.microsoft.com/office/drawing/2014/main" id="{936AA562-C1E2-43E8-AB14-31D81CA31D58}"/>
+                <a16:creationId xmlns:a16="http://schemas.microsoft.com/office/drawing/2014/main" id="{2E8F9EA8-F38F-49C6-BBD9-D9FDC15A0E8A}"/>
               </a:ext>
             </a:extLst>
           </p:cNvPr>
@@ -7861,7 +7861,7 @@
           <p:cNvPr id="3" name="">
             <a:extLst xmlns:a="http://schemas.openxmlformats.org/drawingml/2006/main">
               <a:ext uri="{FF2B5EF4-FFF2-40B4-BE49-F238E27FC236}">
-                <a16:creationId xmlns:a16="http://schemas.microsoft.com/office/drawing/2014/main" id="{76950F61-71CC-4233-A9E0-477157C94F71}"/>
+                <a16:creationId xmlns:a16="http://schemas.microsoft.com/office/drawing/2014/main" id="{FD1FCFA4-79DB-495C-99B5-17EE59A9552C}"/>
               </a:ext>
             </a:extLst>
           </p:cNvPr>
@@ -7893,7 +7893,7 @@
           <p:cNvPr id="4" name="">
             <a:extLst xmlns:a="http://schemas.openxmlformats.org/drawingml/2006/main">
               <a:ext uri="{FF2B5EF4-FFF2-40B4-BE49-F238E27FC236}">
-                <a16:creationId xmlns:a16="http://schemas.microsoft.com/office/drawing/2014/main" id="{82A6550F-D80B-437D-88BC-60366E846F81}"/>
+                <a16:creationId xmlns:a16="http://schemas.microsoft.com/office/drawing/2014/main" id="{1CB9E421-7E11-4BC1-ACD2-2C556C965F0A}"/>
               </a:ext>
             </a:extLst>
           </p:cNvPr>
@@ -7950,7 +7950,7 @@
           <p:cNvPr id="5" name="">
             <a:extLst xmlns:a="http://schemas.openxmlformats.org/drawingml/2006/main">
               <a:ext uri="{FF2B5EF4-FFF2-40B4-BE49-F238E27FC236}">
-                <a16:creationId xmlns:a16="http://schemas.microsoft.com/office/drawing/2014/main" id="{70D94134-82C0-403C-BC2C-12D33305FCF3}"/>
+                <a16:creationId xmlns:a16="http://schemas.microsoft.com/office/drawing/2014/main" id="{0489F6D5-A8A6-4405-94B0-6295C486138F}"/>
               </a:ext>
             </a:extLst>
           </p:cNvPr>
@@ -8007,7 +8007,7 @@
           <p:cNvPr id="6" name="">
             <a:extLst xmlns:a="http://schemas.openxmlformats.org/drawingml/2006/main">
               <a:ext uri="{FF2B5EF4-FFF2-40B4-BE49-F238E27FC236}">
-                <a16:creationId xmlns:a16="http://schemas.microsoft.com/office/drawing/2014/main" id="{A334403F-6766-412B-A670-5A5FF344138D}"/>
+                <a16:creationId xmlns:a16="http://schemas.microsoft.com/office/drawing/2014/main" id="{03AD55DA-99F4-4A94-AE97-18B9DABCACD0}"/>
               </a:ext>
             </a:extLst>
           </p:cNvPr>
@@ -8064,7 +8064,7 @@
           <p:cNvPr id="7" name="">
             <a:extLst xmlns:a="http://schemas.openxmlformats.org/drawingml/2006/main">
               <a:ext uri="{FF2B5EF4-FFF2-40B4-BE49-F238E27FC236}">
-                <a16:creationId xmlns:a16="http://schemas.microsoft.com/office/drawing/2014/main" id="{EBE71CD3-B577-45B5-B066-E6BEFC34F6A5}"/>
+                <a16:creationId xmlns:a16="http://schemas.microsoft.com/office/drawing/2014/main" id="{2AD1DFF4-A0A8-4620-9499-989C4655B7A2}"/>
               </a:ext>
             </a:extLst>
           </p:cNvPr>
@@ -8096,7 +8096,7 @@
           <p:cNvPr id="8" name="">
             <a:extLst xmlns:a="http://schemas.openxmlformats.org/drawingml/2006/main">
               <a:ext uri="{FF2B5EF4-FFF2-40B4-BE49-F238E27FC236}">
-                <a16:creationId xmlns:a16="http://schemas.microsoft.com/office/drawing/2014/main" id="{B0D19D6E-C6F2-43BF-B16F-C8289193C051}"/>
+                <a16:creationId xmlns:a16="http://schemas.microsoft.com/office/drawing/2014/main" id="{7367ADC8-B932-45CD-ACE3-C3C30778F3E3}"/>
               </a:ext>
             </a:extLst>
           </p:cNvPr>
@@ -8153,7 +8153,7 @@
           <p:cNvPr id="9" name="">
             <a:extLst xmlns:a="http://schemas.openxmlformats.org/drawingml/2006/main">
               <a:ext uri="{FF2B5EF4-FFF2-40B4-BE49-F238E27FC236}">
-                <a16:creationId xmlns:a16="http://schemas.microsoft.com/office/drawing/2014/main" id="{BDFD296B-DEE5-41AA-9363-78D0F935E729}"/>
+                <a16:creationId xmlns:a16="http://schemas.microsoft.com/office/drawing/2014/main" id="{A463EB71-B074-44BE-9025-86E6907ADFD2}"/>
               </a:ext>
             </a:extLst>
           </p:cNvPr>
@@ -8210,19 +8210,19 @@
           <p:cNvPr id="10" name="">
             <a:extLst xmlns:a="http://schemas.openxmlformats.org/drawingml/2006/main">
               <a:ext uri="{FF2B5EF4-FFF2-40B4-BE49-F238E27FC236}">
-                <a16:creationId xmlns:a16="http://schemas.microsoft.com/office/drawing/2014/main" id="{0F17CBB2-6654-441F-8DEA-988451849B54}"/>
-              </a:ext>
-            </a:extLst>
-          </p:cNvPr>
-          <p:cNvSpPr>
-            <a:spLocks xmlns:a="http://schemas.openxmlformats.org/drawingml/2006/main" noGrp="1"/>
-          </p:cNvSpPr>
-          <p:nvPr/>
-        </p:nvSpPr>
-        <p:spPr>
-          <a:xfrm xmlns:a="http://schemas.openxmlformats.org/drawingml/2006/main">
-            <a:off x="914400" y="1257300"/>
-            <a:ext cx="10363200" cy="781050"/>
+                <a16:creationId xmlns:a16="http://schemas.microsoft.com/office/drawing/2014/main" id="{B8B63D7D-976A-466B-9244-BAB09E397099}"/>
+              </a:ext>
+            </a:extLst>
+          </p:cNvPr>
+          <p:cNvSpPr>
+            <a:spLocks xmlns:a="http://schemas.openxmlformats.org/drawingml/2006/main" noGrp="1"/>
+          </p:cNvSpPr>
+          <p:nvPr/>
+        </p:nvSpPr>
+        <p:spPr>
+          <a:xfrm xmlns:a="http://schemas.openxmlformats.org/drawingml/2006/main">
+            <a:off x="857250" y="1219200"/>
+            <a:ext cx="10477500" cy="742950"/>
           </a:xfrm>
           <a:prstGeom xmlns:a="http://schemas.openxmlformats.org/drawingml/2006/main" prst="rect">
             <a:avLst/>
@@ -8239,7 +8239,7 @@
           <a:lstStyle xmlns:a="http://schemas.openxmlformats.org/drawingml/2006/main"/>
           <a:p xmlns:a="http://schemas.openxmlformats.org/drawingml/2006/main">
             <a:pPr algn="ctr">
-              <a:defRPr sz="2175" b="1">
+              <a:defRPr sz="2100" b="1">
                 <a:solidFill>
                   <a:srgbClr val="17253A"/>
                 </a:solidFill>
@@ -8249,7 +8249,7 @@
               </a:defRPr>
             </a:pPr>
             <a:r>
-              <a:rPr sz="2175" b="1">
+              <a:rPr sz="2100" b="1">
                 <a:solidFill>
                   <a:srgbClr val="17253A"/>
                 </a:solidFill>
@@ -8267,28 +8267,30 @@
           <p:cNvPr id="11" name="">
             <a:extLst xmlns:a="http://schemas.openxmlformats.org/drawingml/2006/main">
               <a:ext uri="{FF2B5EF4-FFF2-40B4-BE49-F238E27FC236}">
-                <a16:creationId xmlns:a16="http://schemas.microsoft.com/office/drawing/2014/main" id="{BD6DB64F-BC88-497E-A4B6-62EFFA2BE8DE}"/>
-              </a:ext>
-            </a:extLst>
-          </p:cNvPr>
-          <p:cNvSpPr>
-            <a:spLocks xmlns:a="http://schemas.openxmlformats.org/drawingml/2006/main" noGrp="1"/>
-          </p:cNvSpPr>
-          <p:nvPr/>
-        </p:nvSpPr>
-        <p:spPr>
-          <a:xfrm xmlns:a="http://schemas.openxmlformats.org/drawingml/2006/main">
-            <a:off x="1000125" y="2247900"/>
-            <a:ext cx="476250" cy="476250"/>
-          </a:xfrm>
-          <a:prstGeom xmlns:a="http://schemas.openxmlformats.org/drawingml/2006/main" prst="ellipse">
+                <a16:creationId xmlns:a16="http://schemas.microsoft.com/office/drawing/2014/main" id="{89522503-BEC1-4AF7-9A31-2BF91B2AA386}"/>
+              </a:ext>
+            </a:extLst>
+          </p:cNvPr>
+          <p:cNvSpPr>
+            <a:spLocks xmlns:a="http://schemas.openxmlformats.org/drawingml/2006/main" noGrp="1"/>
+          </p:cNvSpPr>
+          <p:nvPr/>
+        </p:nvSpPr>
+        <p:spPr>
+          <a:xfrm xmlns:a="http://schemas.openxmlformats.org/drawingml/2006/main">
+            <a:off x="971550" y="2124075"/>
+            <a:ext cx="38100" cy="3524250"/>
+          </a:xfrm>
+          <a:prstGeom xmlns:a="http://schemas.openxmlformats.org/drawingml/2006/main" prst="rect">
             <a:avLst/>
           </a:prstGeom>
           <a:solidFill xmlns:a="http://schemas.openxmlformats.org/drawingml/2006/main">
-            <a:srgbClr val="18324A"/>
+            <a:srgbClr val="2C6E73"/>
           </a:solidFill>
           <a:ln xmlns:a="http://schemas.openxmlformats.org/drawingml/2006/main" w="0">
-            <a:noFill/>
+            <a:solidFill>
+              <a:srgbClr val="2C6E73"/>
+            </a:solidFill>
           </a:ln>
         </p:spPr>
       </p:sp>
@@ -8297,19 +8299,19 @@
           <p:cNvPr id="12" name="">
             <a:extLst xmlns:a="http://schemas.openxmlformats.org/drawingml/2006/main">
               <a:ext uri="{FF2B5EF4-FFF2-40B4-BE49-F238E27FC236}">
-                <a16:creationId xmlns:a16="http://schemas.microsoft.com/office/drawing/2014/main" id="{6B4BA62D-3A08-400B-BD20-5D1D64A4A29C}"/>
-              </a:ext>
-            </a:extLst>
-          </p:cNvPr>
-          <p:cNvSpPr>
-            <a:spLocks xmlns:a="http://schemas.openxmlformats.org/drawingml/2006/main" noGrp="1"/>
-          </p:cNvSpPr>
-          <p:nvPr/>
-        </p:nvSpPr>
-        <p:spPr>
-          <a:xfrm xmlns:a="http://schemas.openxmlformats.org/drawingml/2006/main">
-            <a:off x="1000125" y="2276475"/>
-            <a:ext cx="476250" cy="419100"/>
+                <a16:creationId xmlns:a16="http://schemas.microsoft.com/office/drawing/2014/main" id="{18638BE9-8A11-4C92-A30D-1C74065D3A56}"/>
+              </a:ext>
+            </a:extLst>
+          </p:cNvPr>
+          <p:cNvSpPr>
+            <a:spLocks xmlns:a="http://schemas.openxmlformats.org/drawingml/2006/main" noGrp="1"/>
+          </p:cNvSpPr>
+          <p:nvPr/>
+        </p:nvSpPr>
+        <p:spPr>
+          <a:xfrm xmlns:a="http://schemas.openxmlformats.org/drawingml/2006/main">
+            <a:off x="1162050" y="2200275"/>
+            <a:ext cx="400050" cy="400050"/>
           </a:xfrm>
           <a:prstGeom xmlns:a="http://schemas.openxmlformats.org/drawingml/2006/main" prst="rect">
             <a:avLst/>
@@ -8326,9 +8328,9 @@
           <a:lstStyle xmlns:a="http://schemas.openxmlformats.org/drawingml/2006/main"/>
           <a:p xmlns:a="http://schemas.openxmlformats.org/drawingml/2006/main">
             <a:pPr algn="ctr">
-              <a:defRPr sz="1350" b="1">
-                <a:solidFill>
-                  <a:srgbClr val="FFFFFF"/>
+              <a:defRPr sz="1125" b="1">
+                <a:solidFill>
+                  <a:srgbClr val="2C6E73"/>
                 </a:solidFill>
                 <a:latin typeface="Arial"/>
                 <a:ea typeface="Arial"/>
@@ -8336,9 +8338,9 @@
               </a:defRPr>
             </a:pPr>
             <a:r>
-              <a:rPr sz="1350" b="1">
-                <a:solidFill>
-                  <a:srgbClr val="FFFFFF"/>
+              <a:rPr sz="1125" b="1">
+                <a:solidFill>
+                  <a:srgbClr val="2C6E73"/>
                 </a:solidFill>
                 <a:latin typeface="Arial"/>
                 <a:ea typeface="Arial"/>
@@ -8354,19 +8356,19 @@
           <p:cNvPr id="13" name="">
             <a:extLst xmlns:a="http://schemas.openxmlformats.org/drawingml/2006/main">
               <a:ext uri="{FF2B5EF4-FFF2-40B4-BE49-F238E27FC236}">
-                <a16:creationId xmlns:a16="http://schemas.microsoft.com/office/drawing/2014/main" id="{0C89EC61-3284-44EB-BE98-387839CF8902}"/>
-              </a:ext>
-            </a:extLst>
-          </p:cNvPr>
-          <p:cNvSpPr>
-            <a:spLocks xmlns:a="http://schemas.openxmlformats.org/drawingml/2006/main" noGrp="1"/>
-          </p:cNvSpPr>
-          <p:nvPr/>
-        </p:nvSpPr>
-        <p:spPr>
-          <a:xfrm xmlns:a="http://schemas.openxmlformats.org/drawingml/2006/main">
-            <a:off x="1714500" y="2181225"/>
-            <a:ext cx="9429750" cy="609600"/>
+                <a16:creationId xmlns:a16="http://schemas.microsoft.com/office/drawing/2014/main" id="{31E0E9D0-8A88-4CD3-9293-88AE73835826}"/>
+              </a:ext>
+            </a:extLst>
+          </p:cNvPr>
+          <p:cNvSpPr>
+            <a:spLocks xmlns:a="http://schemas.openxmlformats.org/drawingml/2006/main" noGrp="1"/>
+          </p:cNvSpPr>
+          <p:nvPr/>
+        </p:nvSpPr>
+        <p:spPr>
+          <a:xfrm xmlns:a="http://schemas.openxmlformats.org/drawingml/2006/main">
+            <a:off x="1714500" y="2114550"/>
+            <a:ext cx="9525000" cy="809625"/>
           </a:xfrm>
           <a:prstGeom xmlns:a="http://schemas.openxmlformats.org/drawingml/2006/main" prst="rect">
             <a:avLst/>
@@ -8383,7 +8385,7 @@
           <a:lstStyle xmlns:a="http://schemas.openxmlformats.org/drawingml/2006/main"/>
           <a:p xmlns:a="http://schemas.openxmlformats.org/drawingml/2006/main">
             <a:pPr algn="l">
-              <a:defRPr sz="1500" b="0">
+              <a:defRPr sz="1725" b="0">
                 <a:solidFill>
                   <a:srgbClr val="17253A"/>
                 </a:solidFill>
@@ -8393,7 +8395,7 @@
               </a:defRPr>
             </a:pPr>
             <a:r>
-              <a:rPr sz="1500" b="0">
+              <a:rPr sz="1725" b="0">
                 <a:solidFill>
                   <a:srgbClr val="17253A"/>
                 </a:solidFill>
@@ -8401,7 +8403,7 @@
                 <a:ea typeface="Arial"/>
                 <a:cs typeface="Arial"/>
               </a:rPr>
-              <a:t>Identify the structure: Represent the fraction as equal parts or use an equivalent multiplication.</a:t>
+              <a:t>7/8 litre ÷ 3 cups</a:t>
             </a:r>
           </a:p>
         </p:txBody>
@@ -8411,28 +8413,30 @@
           <p:cNvPr id="14" name="">
             <a:extLst xmlns:a="http://schemas.openxmlformats.org/drawingml/2006/main">
               <a:ext uri="{FF2B5EF4-FFF2-40B4-BE49-F238E27FC236}">
-                <a16:creationId xmlns:a16="http://schemas.microsoft.com/office/drawing/2014/main" id="{D31901CB-CACC-469A-BAC9-C833BA063C95}"/>
-              </a:ext>
-            </a:extLst>
-          </p:cNvPr>
-          <p:cNvSpPr>
-            <a:spLocks xmlns:a="http://schemas.openxmlformats.org/drawingml/2006/main" noGrp="1"/>
-          </p:cNvSpPr>
-          <p:nvPr/>
-        </p:nvSpPr>
-        <p:spPr>
-          <a:xfrm xmlns:a="http://schemas.openxmlformats.org/drawingml/2006/main">
-            <a:off x="1000125" y="2990850"/>
-            <a:ext cx="476250" cy="476250"/>
-          </a:xfrm>
-          <a:prstGeom xmlns:a="http://schemas.openxmlformats.org/drawingml/2006/main" prst="ellipse">
+                <a16:creationId xmlns:a16="http://schemas.microsoft.com/office/drawing/2014/main" id="{8DA338F3-98E6-4949-89B3-D3E4C01D9B17}"/>
+              </a:ext>
+            </a:extLst>
+          </p:cNvPr>
+          <p:cNvSpPr>
+            <a:spLocks xmlns:a="http://schemas.openxmlformats.org/drawingml/2006/main" noGrp="1"/>
+          </p:cNvSpPr>
+          <p:nvPr/>
+        </p:nvSpPr>
+        <p:spPr>
+          <a:xfrm xmlns:a="http://schemas.openxmlformats.org/drawingml/2006/main">
+            <a:off x="1714500" y="2943225"/>
+            <a:ext cx="9334500" cy="9525"/>
+          </a:xfrm>
+          <a:prstGeom xmlns:a="http://schemas.openxmlformats.org/drawingml/2006/main" prst="rect">
             <a:avLst/>
           </a:prstGeom>
           <a:solidFill xmlns:a="http://schemas.openxmlformats.org/drawingml/2006/main">
-            <a:srgbClr val="2C6E73"/>
+            <a:srgbClr val="D9E0E6"/>
           </a:solidFill>
           <a:ln xmlns:a="http://schemas.openxmlformats.org/drawingml/2006/main" w="0">
-            <a:noFill/>
+            <a:solidFill>
+              <a:srgbClr val="D9E0E6"/>
+            </a:solidFill>
           </a:ln>
         </p:spPr>
       </p:sp>
@@ -8441,19 +8445,19 @@
           <p:cNvPr id="15" name="">
             <a:extLst xmlns:a="http://schemas.openxmlformats.org/drawingml/2006/main">
               <a:ext uri="{FF2B5EF4-FFF2-40B4-BE49-F238E27FC236}">
-                <a16:creationId xmlns:a16="http://schemas.microsoft.com/office/drawing/2014/main" id="{AC15A360-C8DC-4361-85F2-6E74FD1E11C4}"/>
-              </a:ext>
-            </a:extLst>
-          </p:cNvPr>
-          <p:cNvSpPr>
-            <a:spLocks xmlns:a="http://schemas.openxmlformats.org/drawingml/2006/main" noGrp="1"/>
-          </p:cNvSpPr>
-          <p:nvPr/>
-        </p:nvSpPr>
-        <p:spPr>
-          <a:xfrm xmlns:a="http://schemas.openxmlformats.org/drawingml/2006/main">
-            <a:off x="1000125" y="3019425"/>
-            <a:ext cx="476250" cy="419100"/>
+                <a16:creationId xmlns:a16="http://schemas.microsoft.com/office/drawing/2014/main" id="{2705A0A0-96B6-4462-8ADD-908AC932E671}"/>
+              </a:ext>
+            </a:extLst>
+          </p:cNvPr>
+          <p:cNvSpPr>
+            <a:spLocks xmlns:a="http://schemas.openxmlformats.org/drawingml/2006/main" noGrp="1"/>
+          </p:cNvSpPr>
+          <p:nvPr/>
+        </p:nvSpPr>
+        <p:spPr>
+          <a:xfrm xmlns:a="http://schemas.openxmlformats.org/drawingml/2006/main">
+            <a:off x="1162050" y="3076575"/>
+            <a:ext cx="400050" cy="400050"/>
           </a:xfrm>
           <a:prstGeom xmlns:a="http://schemas.openxmlformats.org/drawingml/2006/main" prst="rect">
             <a:avLst/>
@@ -8470,9 +8474,9 @@
           <a:lstStyle xmlns:a="http://schemas.openxmlformats.org/drawingml/2006/main"/>
           <a:p xmlns:a="http://schemas.openxmlformats.org/drawingml/2006/main">
             <a:pPr algn="ctr">
-              <a:defRPr sz="1350" b="1">
-                <a:solidFill>
-                  <a:srgbClr val="FFFFFF"/>
+              <a:defRPr sz="1125" b="1">
+                <a:solidFill>
+                  <a:srgbClr val="2C6E73"/>
                 </a:solidFill>
                 <a:latin typeface="Arial"/>
                 <a:ea typeface="Arial"/>
@@ -8480,9 +8484,9 @@
               </a:defRPr>
             </a:pPr>
             <a:r>
-              <a:rPr sz="1350" b="1">
-                <a:solidFill>
-                  <a:srgbClr val="FFFFFF"/>
+              <a:rPr sz="1125" b="1">
+                <a:solidFill>
+                  <a:srgbClr val="2C6E73"/>
                 </a:solidFill>
                 <a:latin typeface="Arial"/>
                 <a:ea typeface="Arial"/>
@@ -8498,19 +8502,19 @@
           <p:cNvPr id="16" name="">
             <a:extLst xmlns:a="http://schemas.openxmlformats.org/drawingml/2006/main">
               <a:ext uri="{FF2B5EF4-FFF2-40B4-BE49-F238E27FC236}">
-                <a16:creationId xmlns:a16="http://schemas.microsoft.com/office/drawing/2014/main" id="{3F20ACF4-D296-4B9C-BF1A-E8B11E2EA64F}"/>
-              </a:ext>
-            </a:extLst>
-          </p:cNvPr>
-          <p:cNvSpPr>
-            <a:spLocks xmlns:a="http://schemas.openxmlformats.org/drawingml/2006/main" noGrp="1"/>
-          </p:cNvSpPr>
-          <p:nvPr/>
-        </p:nvSpPr>
-        <p:spPr>
-          <a:xfrm xmlns:a="http://schemas.openxmlformats.org/drawingml/2006/main">
-            <a:off x="1714500" y="2924175"/>
-            <a:ext cx="9429750" cy="609600"/>
+                <a16:creationId xmlns:a16="http://schemas.microsoft.com/office/drawing/2014/main" id="{5A510B23-8B72-4700-9F31-36317A1DF69A}"/>
+              </a:ext>
+            </a:extLst>
+          </p:cNvPr>
+          <p:cNvSpPr>
+            <a:spLocks xmlns:a="http://schemas.openxmlformats.org/drawingml/2006/main" noGrp="1"/>
+          </p:cNvSpPr>
+          <p:nvPr/>
+        </p:nvSpPr>
+        <p:spPr>
+          <a:xfrm xmlns:a="http://schemas.openxmlformats.org/drawingml/2006/main">
+            <a:off x="1714500" y="2990850"/>
+            <a:ext cx="9525000" cy="809625"/>
           </a:xfrm>
           <a:prstGeom xmlns:a="http://schemas.openxmlformats.org/drawingml/2006/main" prst="rect">
             <a:avLst/>
@@ -8527,7 +8531,7 @@
           <a:lstStyle xmlns:a="http://schemas.openxmlformats.org/drawingml/2006/main"/>
           <a:p xmlns:a="http://schemas.openxmlformats.org/drawingml/2006/main">
             <a:pPr algn="l">
-              <a:defRPr sz="1500" b="0">
+              <a:defRPr sz="1725" b="0">
                 <a:solidFill>
                   <a:srgbClr val="17253A"/>
                 </a:solidFill>
@@ -8537,7 +8541,7 @@
               </a:defRPr>
             </a:pPr>
             <a:r>
-              <a:rPr sz="1500" b="0">
+              <a:rPr sz="1725" b="0">
                 <a:solidFill>
                   <a:srgbClr val="17253A"/>
                 </a:solidFill>
@@ -8545,7 +8549,7 @@
                 <a:ea typeface="Arial"/>
                 <a:cs typeface="Arial"/>
               </a:rPr>
-              <a:t>Set up the method: Divide the numerator when possible or multiply the denominator by the whole number.</a:t>
+              <a:t>7/8 × 1/3</a:t>
             </a:r>
           </a:p>
         </p:txBody>
@@ -8555,28 +8559,30 @@
           <p:cNvPr id="17" name="">
             <a:extLst xmlns:a="http://schemas.openxmlformats.org/drawingml/2006/main">
               <a:ext uri="{FF2B5EF4-FFF2-40B4-BE49-F238E27FC236}">
-                <a16:creationId xmlns:a16="http://schemas.microsoft.com/office/drawing/2014/main" id="{AB2F0A5F-106D-4FCE-9BE8-959D3D4918C3}"/>
-              </a:ext>
-            </a:extLst>
-          </p:cNvPr>
-          <p:cNvSpPr>
-            <a:spLocks xmlns:a="http://schemas.openxmlformats.org/drawingml/2006/main" noGrp="1"/>
-          </p:cNvSpPr>
-          <p:nvPr/>
-        </p:nvSpPr>
-        <p:spPr>
-          <a:xfrm xmlns:a="http://schemas.openxmlformats.org/drawingml/2006/main">
-            <a:off x="1000125" y="3733800"/>
-            <a:ext cx="476250" cy="476250"/>
-          </a:xfrm>
-          <a:prstGeom xmlns:a="http://schemas.openxmlformats.org/drawingml/2006/main" prst="ellipse">
+                <a16:creationId xmlns:a16="http://schemas.microsoft.com/office/drawing/2014/main" id="{BDC3A4D8-F377-465F-B0A0-019AD83F879C}"/>
+              </a:ext>
+            </a:extLst>
+          </p:cNvPr>
+          <p:cNvSpPr>
+            <a:spLocks xmlns:a="http://schemas.openxmlformats.org/drawingml/2006/main" noGrp="1"/>
+          </p:cNvSpPr>
+          <p:nvPr/>
+        </p:nvSpPr>
+        <p:spPr>
+          <a:xfrm xmlns:a="http://schemas.openxmlformats.org/drawingml/2006/main">
+            <a:off x="1714500" y="3819525"/>
+            <a:ext cx="9334500" cy="9525"/>
+          </a:xfrm>
+          <a:prstGeom xmlns:a="http://schemas.openxmlformats.org/drawingml/2006/main" prst="rect">
             <a:avLst/>
           </a:prstGeom>
           <a:solidFill xmlns:a="http://schemas.openxmlformats.org/drawingml/2006/main">
-            <a:srgbClr val="2C6E73"/>
+            <a:srgbClr val="D9E0E6"/>
           </a:solidFill>
           <a:ln xmlns:a="http://schemas.openxmlformats.org/drawingml/2006/main" w="0">
-            <a:noFill/>
+            <a:solidFill>
+              <a:srgbClr val="D9E0E6"/>
+            </a:solidFill>
           </a:ln>
         </p:spPr>
       </p:sp>
@@ -8585,19 +8591,19 @@
           <p:cNvPr id="18" name="">
             <a:extLst xmlns:a="http://schemas.openxmlformats.org/drawingml/2006/main">
               <a:ext uri="{FF2B5EF4-FFF2-40B4-BE49-F238E27FC236}">
-                <a16:creationId xmlns:a16="http://schemas.microsoft.com/office/drawing/2014/main" id="{84E6A87D-2D1C-4113-8342-218A67DD8271}"/>
-              </a:ext>
-            </a:extLst>
-          </p:cNvPr>
-          <p:cNvSpPr>
-            <a:spLocks xmlns:a="http://schemas.openxmlformats.org/drawingml/2006/main" noGrp="1"/>
-          </p:cNvSpPr>
-          <p:nvPr/>
-        </p:nvSpPr>
-        <p:spPr>
-          <a:xfrm xmlns:a="http://schemas.openxmlformats.org/drawingml/2006/main">
-            <a:off x="1000125" y="3762375"/>
-            <a:ext cx="476250" cy="419100"/>
+                <a16:creationId xmlns:a16="http://schemas.microsoft.com/office/drawing/2014/main" id="{D543EAF3-7BA6-4216-844F-90AD385896FE}"/>
+              </a:ext>
+            </a:extLst>
+          </p:cNvPr>
+          <p:cNvSpPr>
+            <a:spLocks xmlns:a="http://schemas.openxmlformats.org/drawingml/2006/main" noGrp="1"/>
+          </p:cNvSpPr>
+          <p:nvPr/>
+        </p:nvSpPr>
+        <p:spPr>
+          <a:xfrm xmlns:a="http://schemas.openxmlformats.org/drawingml/2006/main">
+            <a:off x="1162050" y="3952875"/>
+            <a:ext cx="400050" cy="400050"/>
           </a:xfrm>
           <a:prstGeom xmlns:a="http://schemas.openxmlformats.org/drawingml/2006/main" prst="rect">
             <a:avLst/>
@@ -8614,9 +8620,9 @@
           <a:lstStyle xmlns:a="http://schemas.openxmlformats.org/drawingml/2006/main"/>
           <a:p xmlns:a="http://schemas.openxmlformats.org/drawingml/2006/main">
             <a:pPr algn="ctr">
-              <a:defRPr sz="1350" b="1">
-                <a:solidFill>
-                  <a:srgbClr val="FFFFFF"/>
+              <a:defRPr sz="1125" b="1">
+                <a:solidFill>
+                  <a:srgbClr val="2C6E73"/>
                 </a:solidFill>
                 <a:latin typeface="Arial"/>
                 <a:ea typeface="Arial"/>
@@ -8624,9 +8630,9 @@
               </a:defRPr>
             </a:pPr>
             <a:r>
-              <a:rPr sz="1350" b="1">
-                <a:solidFill>
-                  <a:srgbClr val="FFFFFF"/>
+              <a:rPr sz="1125" b="1">
+                <a:solidFill>
+                  <a:srgbClr val="2C6E73"/>
                 </a:solidFill>
                 <a:latin typeface="Arial"/>
                 <a:ea typeface="Arial"/>
@@ -8642,19 +8648,19 @@
           <p:cNvPr id="19" name="">
             <a:extLst xmlns:a="http://schemas.openxmlformats.org/drawingml/2006/main">
               <a:ext uri="{FF2B5EF4-FFF2-40B4-BE49-F238E27FC236}">
-                <a16:creationId xmlns:a16="http://schemas.microsoft.com/office/drawing/2014/main" id="{3AFA4939-28DB-4AFA-985F-75E82C2152C4}"/>
-              </a:ext>
-            </a:extLst>
-          </p:cNvPr>
-          <p:cNvSpPr>
-            <a:spLocks xmlns:a="http://schemas.openxmlformats.org/drawingml/2006/main" noGrp="1"/>
-          </p:cNvSpPr>
-          <p:nvPr/>
-        </p:nvSpPr>
-        <p:spPr>
-          <a:xfrm xmlns:a="http://schemas.openxmlformats.org/drawingml/2006/main">
-            <a:off x="1714500" y="3667125"/>
-            <a:ext cx="9429750" cy="609600"/>
+                <a16:creationId xmlns:a16="http://schemas.microsoft.com/office/drawing/2014/main" id="{5FA6598E-7F47-4AD1-B03D-29EC4C6E67FE}"/>
+              </a:ext>
+            </a:extLst>
+          </p:cNvPr>
+          <p:cNvSpPr>
+            <a:spLocks xmlns:a="http://schemas.openxmlformats.org/drawingml/2006/main" noGrp="1"/>
+          </p:cNvSpPr>
+          <p:nvPr/>
+        </p:nvSpPr>
+        <p:spPr>
+          <a:xfrm xmlns:a="http://schemas.openxmlformats.org/drawingml/2006/main">
+            <a:off x="1714500" y="3867150"/>
+            <a:ext cx="9525000" cy="809625"/>
           </a:xfrm>
           <a:prstGeom xmlns:a="http://schemas.openxmlformats.org/drawingml/2006/main" prst="rect">
             <a:avLst/>
@@ -8671,7 +8677,7 @@
           <a:lstStyle xmlns:a="http://schemas.openxmlformats.org/drawingml/2006/main"/>
           <a:p xmlns:a="http://schemas.openxmlformats.org/drawingml/2006/main">
             <a:pPr algn="l">
-              <a:defRPr sz="1500" b="0">
+              <a:defRPr sz="1725" b="0">
                 <a:solidFill>
                   <a:srgbClr val="17253A"/>
                 </a:solidFill>
@@ -8681,7 +8687,7 @@
               </a:defRPr>
             </a:pPr>
             <a:r>
-              <a:rPr sz="1500" b="0">
+              <a:rPr sz="1725" b="0">
                 <a:solidFill>
                   <a:srgbClr val="17253A"/>
                 </a:solidFill>
@@ -8689,7 +8695,7 @@
                 <a:ea typeface="Arial"/>
                 <a:cs typeface="Arial"/>
               </a:rPr>
-              <a:t>Complete the calculation: 7/24 litre.</a:t>
+              <a:t>7 × 1 / 8 × 3</a:t>
             </a:r>
           </a:p>
         </p:txBody>
@@ -8699,28 +8705,30 @@
           <p:cNvPr id="20" name="">
             <a:extLst xmlns:a="http://schemas.openxmlformats.org/drawingml/2006/main">
               <a:ext uri="{FF2B5EF4-FFF2-40B4-BE49-F238E27FC236}">
-                <a16:creationId xmlns:a16="http://schemas.microsoft.com/office/drawing/2014/main" id="{58D27F64-516C-442E-9FDB-BB1E4F0ABD71}"/>
-              </a:ext>
-            </a:extLst>
-          </p:cNvPr>
-          <p:cNvSpPr>
-            <a:spLocks xmlns:a="http://schemas.openxmlformats.org/drawingml/2006/main" noGrp="1"/>
-          </p:cNvSpPr>
-          <p:nvPr/>
-        </p:nvSpPr>
-        <p:spPr>
-          <a:xfrm xmlns:a="http://schemas.openxmlformats.org/drawingml/2006/main">
-            <a:off x="1000125" y="4476750"/>
-            <a:ext cx="476250" cy="476250"/>
-          </a:xfrm>
-          <a:prstGeom xmlns:a="http://schemas.openxmlformats.org/drawingml/2006/main" prst="ellipse">
+                <a16:creationId xmlns:a16="http://schemas.microsoft.com/office/drawing/2014/main" id="{7E481D46-B84B-40C8-B374-220429D2C6FE}"/>
+              </a:ext>
+            </a:extLst>
+          </p:cNvPr>
+          <p:cNvSpPr>
+            <a:spLocks xmlns:a="http://schemas.openxmlformats.org/drawingml/2006/main" noGrp="1"/>
+          </p:cNvSpPr>
+          <p:nvPr/>
+        </p:nvSpPr>
+        <p:spPr>
+          <a:xfrm xmlns:a="http://schemas.openxmlformats.org/drawingml/2006/main">
+            <a:off x="1714500" y="4695825"/>
+            <a:ext cx="9334500" cy="9525"/>
+          </a:xfrm>
+          <a:prstGeom xmlns:a="http://schemas.openxmlformats.org/drawingml/2006/main" prst="rect">
             <a:avLst/>
           </a:prstGeom>
           <a:solidFill xmlns:a="http://schemas.openxmlformats.org/drawingml/2006/main">
-            <a:srgbClr val="2C6E73"/>
+            <a:srgbClr val="D9E0E6"/>
           </a:solidFill>
           <a:ln xmlns:a="http://schemas.openxmlformats.org/drawingml/2006/main" w="0">
-            <a:noFill/>
+            <a:solidFill>
+              <a:srgbClr val="D9E0E6"/>
+            </a:solidFill>
           </a:ln>
         </p:spPr>
       </p:sp>
@@ -8729,19 +8737,19 @@
           <p:cNvPr id="21" name="">
             <a:extLst xmlns:a="http://schemas.openxmlformats.org/drawingml/2006/main">
               <a:ext uri="{FF2B5EF4-FFF2-40B4-BE49-F238E27FC236}">
-                <a16:creationId xmlns:a16="http://schemas.microsoft.com/office/drawing/2014/main" id="{250F788E-2D81-44C7-A663-BF75D274EA70}"/>
-              </a:ext>
-            </a:extLst>
-          </p:cNvPr>
-          <p:cNvSpPr>
-            <a:spLocks xmlns:a="http://schemas.openxmlformats.org/drawingml/2006/main" noGrp="1"/>
-          </p:cNvSpPr>
-          <p:nvPr/>
-        </p:nvSpPr>
-        <p:spPr>
-          <a:xfrm xmlns:a="http://schemas.openxmlformats.org/drawingml/2006/main">
-            <a:off x="1000125" y="4505325"/>
-            <a:ext cx="476250" cy="419100"/>
+                <a16:creationId xmlns:a16="http://schemas.microsoft.com/office/drawing/2014/main" id="{4ECFE72C-A37E-41D7-A4B2-115BE617117F}"/>
+              </a:ext>
+            </a:extLst>
+          </p:cNvPr>
+          <p:cNvSpPr>
+            <a:spLocks xmlns:a="http://schemas.openxmlformats.org/drawingml/2006/main" noGrp="1"/>
+          </p:cNvSpPr>
+          <p:nvPr/>
+        </p:nvSpPr>
+        <p:spPr>
+          <a:xfrm xmlns:a="http://schemas.openxmlformats.org/drawingml/2006/main">
+            <a:off x="1162050" y="4829175"/>
+            <a:ext cx="400050" cy="400050"/>
           </a:xfrm>
           <a:prstGeom xmlns:a="http://schemas.openxmlformats.org/drawingml/2006/main" prst="rect">
             <a:avLst/>
@@ -8758,9 +8766,9 @@
           <a:lstStyle xmlns:a="http://schemas.openxmlformats.org/drawingml/2006/main"/>
           <a:p xmlns:a="http://schemas.openxmlformats.org/drawingml/2006/main">
             <a:pPr algn="ctr">
-              <a:defRPr sz="1350" b="1">
-                <a:solidFill>
-                  <a:srgbClr val="FFFFFF"/>
+              <a:defRPr sz="1125" b="1">
+                <a:solidFill>
+                  <a:srgbClr val="2F785D"/>
                 </a:solidFill>
                 <a:latin typeface="Arial"/>
                 <a:ea typeface="Arial"/>
@@ -8768,9 +8776,9 @@
               </a:defRPr>
             </a:pPr>
             <a:r>
-              <a:rPr sz="1350" b="1">
-                <a:solidFill>
-                  <a:srgbClr val="FFFFFF"/>
+              <a:rPr sz="1125" b="1">
+                <a:solidFill>
+                  <a:srgbClr val="2F785D"/>
                 </a:solidFill>
                 <a:latin typeface="Arial"/>
                 <a:ea typeface="Arial"/>
@@ -8786,19 +8794,19 @@
           <p:cNvPr id="22" name="">
             <a:extLst xmlns:a="http://schemas.openxmlformats.org/drawingml/2006/main">
               <a:ext uri="{FF2B5EF4-FFF2-40B4-BE49-F238E27FC236}">
-                <a16:creationId xmlns:a16="http://schemas.microsoft.com/office/drawing/2014/main" id="{3E2046DA-4C52-46CF-9529-6E1112AB6CE6}"/>
-              </a:ext>
-            </a:extLst>
-          </p:cNvPr>
-          <p:cNvSpPr>
-            <a:spLocks xmlns:a="http://schemas.openxmlformats.org/drawingml/2006/main" noGrp="1"/>
-          </p:cNvSpPr>
-          <p:nvPr/>
-        </p:nvSpPr>
-        <p:spPr>
-          <a:xfrm xmlns:a="http://schemas.openxmlformats.org/drawingml/2006/main">
-            <a:off x="1714500" y="4410075"/>
-            <a:ext cx="9429750" cy="609600"/>
+                <a16:creationId xmlns:a16="http://schemas.microsoft.com/office/drawing/2014/main" id="{279CCAA1-BA5E-45F4-BC9C-406E689B0F9E}"/>
+              </a:ext>
+            </a:extLst>
+          </p:cNvPr>
+          <p:cNvSpPr>
+            <a:spLocks xmlns:a="http://schemas.openxmlformats.org/drawingml/2006/main" noGrp="1"/>
+          </p:cNvSpPr>
+          <p:nvPr/>
+        </p:nvSpPr>
+        <p:spPr>
+          <a:xfrm xmlns:a="http://schemas.openxmlformats.org/drawingml/2006/main">
+            <a:off x="1714500" y="4743450"/>
+            <a:ext cx="9525000" cy="809625"/>
           </a:xfrm>
           <a:prstGeom xmlns:a="http://schemas.openxmlformats.org/drawingml/2006/main" prst="rect">
             <a:avLst/>
@@ -8815,7 +8823,7 @@
           <a:lstStyle xmlns:a="http://schemas.openxmlformats.org/drawingml/2006/main"/>
           <a:p xmlns:a="http://schemas.openxmlformats.org/drawingml/2006/main">
             <a:pPr algn="l">
-              <a:defRPr sz="1500" b="1">
+              <a:defRPr sz="1725" b="1">
                 <a:solidFill>
                   <a:srgbClr val="2F785D"/>
                 </a:solidFill>
@@ -8825,7 +8833,7 @@
               </a:defRPr>
             </a:pPr>
             <a:r>
-              <a:rPr sz="1500" b="1">
+              <a:rPr sz="1725" b="1">
                 <a:solidFill>
                   <a:srgbClr val="2F785D"/>
                 </a:solidFill>
@@ -8833,7 +8841,7 @@
                 <a:ea typeface="Arial"/>
                 <a:cs typeface="Arial"/>
               </a:rPr>
-              <a:t>Check the result: Simplify and check by multiplying back.</a:t>
+              <a:t>7/24 litre in each cup</a:t>
             </a:r>
           </a:p>
         </p:txBody>
@@ -8841,7 +8849,7 @@
     </p:spTree>
     <p:extLst>
       <p:ext uri="{BB962C8B-B14F-4D97-AF65-F5344CB8AC3E}">
-        <p14:creationId xmlns:p14="http://schemas.microsoft.com/office/powerpoint/2010/main" val="289850515"/>
+        <p14:creationId xmlns:p14="http://schemas.microsoft.com/office/powerpoint/2010/main" val="354444712"/>
       </p:ext>
     </p:extLst>
   </p:cSld>
@@ -9134,7 +9142,7 @@
           <p:cNvPr id="15" name="">
             <a:extLst xmlns:a="http://schemas.openxmlformats.org/drawingml/2006/main">
               <a:ext uri="{FF2B5EF4-FFF2-40B4-BE49-F238E27FC236}">
-                <a16:creationId xmlns:a16="http://schemas.microsoft.com/office/drawing/2014/main" id="{03E0ACCA-0E81-4234-99C3-E0EFFB5B146F}"/>
+                <a16:creationId xmlns:a16="http://schemas.microsoft.com/office/drawing/2014/main" id="{24649A2D-5CA8-46EA-B891-5F200AE21A4D}"/>
               </a:ext>
             </a:extLst>
           </p:cNvPr>
@@ -9166,7 +9174,7 @@
           <p:cNvPr id="2" name="">
             <a:extLst xmlns:a="http://schemas.openxmlformats.org/drawingml/2006/main">
               <a:ext uri="{FF2B5EF4-FFF2-40B4-BE49-F238E27FC236}">
-                <a16:creationId xmlns:a16="http://schemas.microsoft.com/office/drawing/2014/main" id="{0348F135-1A12-4432-B6AF-6B5EA7C7BA42}"/>
+                <a16:creationId xmlns:a16="http://schemas.microsoft.com/office/drawing/2014/main" id="{451F90A3-84B8-4B94-B90C-D1ACD8EA4C24}"/>
               </a:ext>
             </a:extLst>
           </p:cNvPr>
@@ -9223,7 +9231,7 @@
           <p:cNvPr id="3" name="">
             <a:extLst xmlns:a="http://schemas.openxmlformats.org/drawingml/2006/main">
               <a:ext uri="{FF2B5EF4-FFF2-40B4-BE49-F238E27FC236}">
-                <a16:creationId xmlns:a16="http://schemas.microsoft.com/office/drawing/2014/main" id="{C5B7EAD1-4621-472F-B7AB-9C0AFB2F648B}"/>
+                <a16:creationId xmlns:a16="http://schemas.microsoft.com/office/drawing/2014/main" id="{1D5B5440-3296-4D77-A23F-81DC74533004}"/>
               </a:ext>
             </a:extLst>
           </p:cNvPr>
@@ -9255,7 +9263,7 @@
           <p:cNvPr id="4" name="">
             <a:extLst xmlns:a="http://schemas.openxmlformats.org/drawingml/2006/main">
               <a:ext uri="{FF2B5EF4-FFF2-40B4-BE49-F238E27FC236}">
-                <a16:creationId xmlns:a16="http://schemas.microsoft.com/office/drawing/2014/main" id="{312DCE9F-8E25-4CAD-BA12-9B398ACC936F}"/>
+                <a16:creationId xmlns:a16="http://schemas.microsoft.com/office/drawing/2014/main" id="{0E5495E7-45E5-438F-9B97-065F05B69B48}"/>
               </a:ext>
             </a:extLst>
           </p:cNvPr>
@@ -9312,7 +9320,7 @@
           <p:cNvPr id="5" name="">
             <a:extLst xmlns:a="http://schemas.openxmlformats.org/drawingml/2006/main">
               <a:ext uri="{FF2B5EF4-FFF2-40B4-BE49-F238E27FC236}">
-                <a16:creationId xmlns:a16="http://schemas.microsoft.com/office/drawing/2014/main" id="{D54CABC9-F38E-416F-B57E-413EB88369A1}"/>
+                <a16:creationId xmlns:a16="http://schemas.microsoft.com/office/drawing/2014/main" id="{E6EEE6E0-3D28-417F-8686-9E7C5237828D}"/>
               </a:ext>
             </a:extLst>
           </p:cNvPr>
@@ -9369,7 +9377,7 @@
           <p:cNvPr id="6" name="">
             <a:extLst xmlns:a="http://schemas.openxmlformats.org/drawingml/2006/main">
               <a:ext uri="{FF2B5EF4-FFF2-40B4-BE49-F238E27FC236}">
-                <a16:creationId xmlns:a16="http://schemas.microsoft.com/office/drawing/2014/main" id="{29D52FAE-31AE-4A93-923E-14D61B7EE8CC}"/>
+                <a16:creationId xmlns:a16="http://schemas.microsoft.com/office/drawing/2014/main" id="{1B330761-F264-4FE3-86FA-9B5846DFF338}"/>
               </a:ext>
             </a:extLst>
           </p:cNvPr>
@@ -9426,7 +9434,7 @@
           <p:cNvPr id="7" name="">
             <a:extLst xmlns:a="http://schemas.openxmlformats.org/drawingml/2006/main">
               <a:ext uri="{FF2B5EF4-FFF2-40B4-BE49-F238E27FC236}">
-                <a16:creationId xmlns:a16="http://schemas.microsoft.com/office/drawing/2014/main" id="{9F0AD33C-CB53-48EB-9157-B7E26591A3DD}"/>
+                <a16:creationId xmlns:a16="http://schemas.microsoft.com/office/drawing/2014/main" id="{ADF003DF-E896-4131-9B22-9E4DCB899E27}"/>
               </a:ext>
             </a:extLst>
           </p:cNvPr>
@@ -9458,7 +9466,7 @@
           <p:cNvPr id="8" name="">
             <a:extLst xmlns:a="http://schemas.openxmlformats.org/drawingml/2006/main">
               <a:ext uri="{FF2B5EF4-FFF2-40B4-BE49-F238E27FC236}">
-                <a16:creationId xmlns:a16="http://schemas.microsoft.com/office/drawing/2014/main" id="{57F9B0A2-8C2D-4B27-8ED0-DE952C90B03A}"/>
+                <a16:creationId xmlns:a16="http://schemas.microsoft.com/office/drawing/2014/main" id="{826C7648-0D34-4578-A5D0-F39DD79DBA82}"/>
               </a:ext>
             </a:extLst>
           </p:cNvPr>
@@ -9515,7 +9523,7 @@
           <p:cNvPr id="9" name="">
             <a:extLst xmlns:a="http://schemas.openxmlformats.org/drawingml/2006/main">
               <a:ext uri="{FF2B5EF4-FFF2-40B4-BE49-F238E27FC236}">
-                <a16:creationId xmlns:a16="http://schemas.microsoft.com/office/drawing/2014/main" id="{B678D7C9-2EFC-4FDB-9AD9-27CB1081A749}"/>
+                <a16:creationId xmlns:a16="http://schemas.microsoft.com/office/drawing/2014/main" id="{CDF4283B-9B25-4DCB-83F7-8AB6818853B0}"/>
               </a:ext>
             </a:extLst>
           </p:cNvPr>
@@ -9572,7 +9580,7 @@
           <p:cNvPr id="10" name="">
             <a:extLst xmlns:a="http://schemas.openxmlformats.org/drawingml/2006/main">
               <a:ext uri="{FF2B5EF4-FFF2-40B4-BE49-F238E27FC236}">
-                <a16:creationId xmlns:a16="http://schemas.microsoft.com/office/drawing/2014/main" id="{F6F4D14E-F3B4-400C-9686-82DFA03E5991}"/>
+                <a16:creationId xmlns:a16="http://schemas.microsoft.com/office/drawing/2014/main" id="{576694C6-6A19-49F2-AC32-45A87D828AB8}"/>
               </a:ext>
             </a:extLst>
           </p:cNvPr>
@@ -9629,7 +9637,7 @@
           <p:cNvPr id="11" name="">
             <a:extLst xmlns:a="http://schemas.openxmlformats.org/drawingml/2006/main">
               <a:ext uri="{FF2B5EF4-FFF2-40B4-BE49-F238E27FC236}">
-                <a16:creationId xmlns:a16="http://schemas.microsoft.com/office/drawing/2014/main" id="{8019C8A5-1667-4E1F-9288-2E49AD23DA43}"/>
+                <a16:creationId xmlns:a16="http://schemas.microsoft.com/office/drawing/2014/main" id="{3EBFC715-5A2C-4BD9-A499-9A54E512751F}"/>
               </a:ext>
             </a:extLst>
           </p:cNvPr>
@@ -9686,7 +9694,7 @@
           <p:cNvPr id="12" name="">
             <a:extLst xmlns:a="http://schemas.openxmlformats.org/drawingml/2006/main">
               <a:ext uri="{FF2B5EF4-FFF2-40B4-BE49-F238E27FC236}">
-                <a16:creationId xmlns:a16="http://schemas.microsoft.com/office/drawing/2014/main" id="{57F6CC7C-CAB1-4118-9B12-83BE1F960AB8}"/>
+                <a16:creationId xmlns:a16="http://schemas.microsoft.com/office/drawing/2014/main" id="{E8217A1F-3352-4D4B-8CB2-E5B503121F23}"/>
               </a:ext>
             </a:extLst>
           </p:cNvPr>
@@ -9718,7 +9726,7 @@
           <p:cNvPr id="13" name="">
             <a:extLst xmlns:a="http://schemas.openxmlformats.org/drawingml/2006/main">
               <a:ext uri="{FF2B5EF4-FFF2-40B4-BE49-F238E27FC236}">
-                <a16:creationId xmlns:a16="http://schemas.microsoft.com/office/drawing/2014/main" id="{10ECF377-C9E4-448A-BA75-95AA0EBCA5B5}"/>
+                <a16:creationId xmlns:a16="http://schemas.microsoft.com/office/drawing/2014/main" id="{88FBDE4D-E5ED-4491-8D45-B7CB5FB673A9}"/>
               </a:ext>
             </a:extLst>
           </p:cNvPr>
@@ -9775,7 +9783,7 @@
           <p:cNvPr id="14" name="">
             <a:extLst xmlns:a="http://schemas.openxmlformats.org/drawingml/2006/main">
               <a:ext uri="{FF2B5EF4-FFF2-40B4-BE49-F238E27FC236}">
-                <a16:creationId xmlns:a16="http://schemas.microsoft.com/office/drawing/2014/main" id="{F66CFAF8-C115-45F2-9130-4A105DFA6A64}"/>
+                <a16:creationId xmlns:a16="http://schemas.microsoft.com/office/drawing/2014/main" id="{B68C4C14-BC06-4B67-B922-13ABFF1C6A90}"/>
               </a:ext>
             </a:extLst>
           </p:cNvPr>
@@ -9830,7 +9838,7 @@
     </p:spTree>
     <p:extLst>
       <p:ext uri="{BB962C8B-B14F-4D97-AF65-F5344CB8AC3E}">
-        <p14:creationId xmlns:p14="http://schemas.microsoft.com/office/powerpoint/2010/main" val="1619300830"/>
+        <p14:creationId xmlns:p14="http://schemas.microsoft.com/office/powerpoint/2010/main" val="267912897"/>
       </p:ext>
     </p:extLst>
   </p:cSld>
@@ -10031,7 +10039,7 @@
           <p:cNvPr id="16" name="">
             <a:extLst xmlns:a="http://schemas.openxmlformats.org/drawingml/2006/main">
               <a:ext uri="{FF2B5EF4-FFF2-40B4-BE49-F238E27FC236}">
-                <a16:creationId xmlns:a16="http://schemas.microsoft.com/office/drawing/2014/main" id="{2D591D44-8B4C-4838-961E-6BD63C165F1B}"/>
+                <a16:creationId xmlns:a16="http://schemas.microsoft.com/office/drawing/2014/main" id="{4DF78CA9-4494-4CF7-9ED7-DD829DB71DD8}"/>
               </a:ext>
             </a:extLst>
           </p:cNvPr>
@@ -10063,7 +10071,7 @@
           <p:cNvPr id="2" name="">
             <a:extLst xmlns:a="http://schemas.openxmlformats.org/drawingml/2006/main">
               <a:ext uri="{FF2B5EF4-FFF2-40B4-BE49-F238E27FC236}">
-                <a16:creationId xmlns:a16="http://schemas.microsoft.com/office/drawing/2014/main" id="{F3EE9799-5978-4739-A071-238446C2C8A0}"/>
+                <a16:creationId xmlns:a16="http://schemas.microsoft.com/office/drawing/2014/main" id="{365D5B08-45A1-4FD5-976D-D5981264B3E0}"/>
               </a:ext>
             </a:extLst>
           </p:cNvPr>
@@ -10120,7 +10128,7 @@
           <p:cNvPr id="3" name="">
             <a:extLst xmlns:a="http://schemas.openxmlformats.org/drawingml/2006/main">
               <a:ext uri="{FF2B5EF4-FFF2-40B4-BE49-F238E27FC236}">
-                <a16:creationId xmlns:a16="http://schemas.microsoft.com/office/drawing/2014/main" id="{9A7E99A8-7BBB-4EF4-8DB1-10D76C1C2707}"/>
+                <a16:creationId xmlns:a16="http://schemas.microsoft.com/office/drawing/2014/main" id="{81FE5A17-96DF-4AA4-BAB5-354771C1EC6C}"/>
               </a:ext>
             </a:extLst>
           </p:cNvPr>
@@ -10152,7 +10160,7 @@
           <p:cNvPr id="4" name="">
             <a:extLst xmlns:a="http://schemas.openxmlformats.org/drawingml/2006/main">
               <a:ext uri="{FF2B5EF4-FFF2-40B4-BE49-F238E27FC236}">
-                <a16:creationId xmlns:a16="http://schemas.microsoft.com/office/drawing/2014/main" id="{63E76374-E22D-455B-B7B7-A8FB96EB8F08}"/>
+                <a16:creationId xmlns:a16="http://schemas.microsoft.com/office/drawing/2014/main" id="{7DE34852-76AE-4C86-A303-F30950C72B29}"/>
               </a:ext>
             </a:extLst>
           </p:cNvPr>
@@ -10209,7 +10217,7 @@
           <p:cNvPr id="5" name="">
             <a:extLst xmlns:a="http://schemas.openxmlformats.org/drawingml/2006/main">
               <a:ext uri="{FF2B5EF4-FFF2-40B4-BE49-F238E27FC236}">
-                <a16:creationId xmlns:a16="http://schemas.microsoft.com/office/drawing/2014/main" id="{58DCE3BE-C549-4731-9C92-081A98560CD0}"/>
+                <a16:creationId xmlns:a16="http://schemas.microsoft.com/office/drawing/2014/main" id="{49DF9F81-7D8F-4054-8D00-65240FEA8C82}"/>
               </a:ext>
             </a:extLst>
           </p:cNvPr>
@@ -10266,7 +10274,7 @@
           <p:cNvPr id="6" name="">
             <a:extLst xmlns:a="http://schemas.openxmlformats.org/drawingml/2006/main">
               <a:ext uri="{FF2B5EF4-FFF2-40B4-BE49-F238E27FC236}">
-                <a16:creationId xmlns:a16="http://schemas.microsoft.com/office/drawing/2014/main" id="{6CFA0E8F-C2F1-46F1-BDD5-5976334A1E8B}"/>
+                <a16:creationId xmlns:a16="http://schemas.microsoft.com/office/drawing/2014/main" id="{41A5BF9B-6956-4F06-B2C2-809FAD34B44D}"/>
               </a:ext>
             </a:extLst>
           </p:cNvPr>
@@ -10323,7 +10331,7 @@
           <p:cNvPr id="7" name="">
             <a:extLst xmlns:a="http://schemas.openxmlformats.org/drawingml/2006/main">
               <a:ext uri="{FF2B5EF4-FFF2-40B4-BE49-F238E27FC236}">
-                <a16:creationId xmlns:a16="http://schemas.microsoft.com/office/drawing/2014/main" id="{BA1F5B07-E726-424D-BDE1-3C0E12B6D723}"/>
+                <a16:creationId xmlns:a16="http://schemas.microsoft.com/office/drawing/2014/main" id="{0F3C008C-AA8D-46E3-AA34-DCAAA4C38294}"/>
               </a:ext>
             </a:extLst>
           </p:cNvPr>
@@ -10355,7 +10363,7 @@
           <p:cNvPr id="8" name="">
             <a:extLst xmlns:a="http://schemas.openxmlformats.org/drawingml/2006/main">
               <a:ext uri="{FF2B5EF4-FFF2-40B4-BE49-F238E27FC236}">
-                <a16:creationId xmlns:a16="http://schemas.microsoft.com/office/drawing/2014/main" id="{43603FE7-4814-451B-B824-B05EF0C1F39C}"/>
+                <a16:creationId xmlns:a16="http://schemas.microsoft.com/office/drawing/2014/main" id="{118201DA-21D0-474E-8644-5169DF57E5B3}"/>
               </a:ext>
             </a:extLst>
           </p:cNvPr>
@@ -10412,7 +10420,7 @@
           <p:cNvPr id="9" name="">
             <a:extLst xmlns:a="http://schemas.openxmlformats.org/drawingml/2006/main">
               <a:ext uri="{FF2B5EF4-FFF2-40B4-BE49-F238E27FC236}">
-                <a16:creationId xmlns:a16="http://schemas.microsoft.com/office/drawing/2014/main" id="{5FB3B21C-4F86-40E7-8E8A-FA56B3C4E472}"/>
+                <a16:creationId xmlns:a16="http://schemas.microsoft.com/office/drawing/2014/main" id="{8AC0E67C-E8A5-4D70-972C-1C7BDC9C3AFE}"/>
               </a:ext>
             </a:extLst>
           </p:cNvPr>
@@ -10469,7 +10477,7 @@
           <p:cNvPr id="10" name="">
             <a:extLst xmlns:a="http://schemas.openxmlformats.org/drawingml/2006/main">
               <a:ext uri="{FF2B5EF4-FFF2-40B4-BE49-F238E27FC236}">
-                <a16:creationId xmlns:a16="http://schemas.microsoft.com/office/drawing/2014/main" id="{018338F7-C0D0-4698-924D-CB4DE1BF1D74}"/>
+                <a16:creationId xmlns:a16="http://schemas.microsoft.com/office/drawing/2014/main" id="{60549CDD-5611-4D4B-9093-A79DC221828C}"/>
               </a:ext>
             </a:extLst>
           </p:cNvPr>
@@ -10526,7 +10534,7 @@
           <p:cNvPr id="11" name="">
             <a:extLst xmlns:a="http://schemas.openxmlformats.org/drawingml/2006/main">
               <a:ext uri="{FF2B5EF4-FFF2-40B4-BE49-F238E27FC236}">
-                <a16:creationId xmlns:a16="http://schemas.microsoft.com/office/drawing/2014/main" id="{EF2484CC-4263-43E6-9899-4DDAF8164A58}"/>
+                <a16:creationId xmlns:a16="http://schemas.microsoft.com/office/drawing/2014/main" id="{5C9F13CC-3E24-493F-8D35-DAEDDC0D3A03}"/>
               </a:ext>
             </a:extLst>
           </p:cNvPr>
@@ -10583,7 +10591,7 @@
           <p:cNvPr id="12" name="">
             <a:extLst xmlns:a="http://schemas.openxmlformats.org/drawingml/2006/main">
               <a:ext uri="{FF2B5EF4-FFF2-40B4-BE49-F238E27FC236}">
-                <a16:creationId xmlns:a16="http://schemas.microsoft.com/office/drawing/2014/main" id="{20C761EF-5101-46B7-BB1E-B4D929FCE2F9}"/>
+                <a16:creationId xmlns:a16="http://schemas.microsoft.com/office/drawing/2014/main" id="{C8D8337A-EA7F-4106-BD1A-63CA535B73C5}"/>
               </a:ext>
             </a:extLst>
           </p:cNvPr>
@@ -10640,7 +10648,7 @@
           <p:cNvPr id="13" name="">
             <a:extLst xmlns:a="http://schemas.openxmlformats.org/drawingml/2006/main">
               <a:ext uri="{FF2B5EF4-FFF2-40B4-BE49-F238E27FC236}">
-                <a16:creationId xmlns:a16="http://schemas.microsoft.com/office/drawing/2014/main" id="{A3DCC91B-23C3-4AF1-8475-69BEA2FD7C75}"/>
+                <a16:creationId xmlns:a16="http://schemas.microsoft.com/office/drawing/2014/main" id="{F5B50218-156D-42A4-A8F0-BB1E6234DED6}"/>
               </a:ext>
             </a:extLst>
           </p:cNvPr>
@@ -10697,7 +10705,7 @@
           <p:cNvPr id="14" name="">
             <a:extLst xmlns:a="http://schemas.openxmlformats.org/drawingml/2006/main">
               <a:ext uri="{FF2B5EF4-FFF2-40B4-BE49-F238E27FC236}">
-                <a16:creationId xmlns:a16="http://schemas.microsoft.com/office/drawing/2014/main" id="{3DB36552-DCFB-40E7-9A16-0EA959B10F7A}"/>
+                <a16:creationId xmlns:a16="http://schemas.microsoft.com/office/drawing/2014/main" id="{ADC42DC4-408D-4D67-A0CE-75D6EC9A30E6}"/>
               </a:ext>
             </a:extLst>
           </p:cNvPr>
@@ -10754,7 +10762,7 @@
           <p:cNvPr id="15" name="">
             <a:extLst xmlns:a="http://schemas.openxmlformats.org/drawingml/2006/main">
               <a:ext uri="{FF2B5EF4-FFF2-40B4-BE49-F238E27FC236}">
-                <a16:creationId xmlns:a16="http://schemas.microsoft.com/office/drawing/2014/main" id="{F8AE4795-62DD-4ED7-AA07-E7C0172B5239}"/>
+                <a16:creationId xmlns:a16="http://schemas.microsoft.com/office/drawing/2014/main" id="{0C5E4601-CFDF-48E4-895D-1BBA0FBFCE29}"/>
               </a:ext>
             </a:extLst>
           </p:cNvPr>
@@ -10809,7 +10817,7 @@
     </p:spTree>
     <p:extLst>
       <p:ext uri="{BB962C8B-B14F-4D97-AF65-F5344CB8AC3E}">
-        <p14:creationId xmlns:p14="http://schemas.microsoft.com/office/powerpoint/2010/main" val="407268306"/>
+        <p14:creationId xmlns:p14="http://schemas.microsoft.com/office/powerpoint/2010/main" val="1242892449"/>
       </p:ext>
     </p:extLst>
   </p:cSld>
@@ -10964,7 +10972,7 @@
           <p:cNvPr id="16" name="">
             <a:extLst xmlns:a="http://schemas.openxmlformats.org/drawingml/2006/main">
               <a:ext uri="{FF2B5EF4-FFF2-40B4-BE49-F238E27FC236}">
-                <a16:creationId xmlns:a16="http://schemas.microsoft.com/office/drawing/2014/main" id="{E28DD7DF-1163-401D-BA67-09E9BC6867A2}"/>
+                <a16:creationId xmlns:a16="http://schemas.microsoft.com/office/drawing/2014/main" id="{6F1D1D42-8F1B-4B4E-8FB1-F78C3A8274A0}"/>
               </a:ext>
             </a:extLst>
           </p:cNvPr>
@@ -10996,7 +11004,7 @@
           <p:cNvPr id="2" name="">
             <a:extLst xmlns:a="http://schemas.openxmlformats.org/drawingml/2006/main">
               <a:ext uri="{FF2B5EF4-FFF2-40B4-BE49-F238E27FC236}">
-                <a16:creationId xmlns:a16="http://schemas.microsoft.com/office/drawing/2014/main" id="{0C745EE9-8462-49C6-A9DC-455ED5859333}"/>
+                <a16:creationId xmlns:a16="http://schemas.microsoft.com/office/drawing/2014/main" id="{85108EB4-99A7-45AA-8843-A0DE4F2E4296}"/>
               </a:ext>
             </a:extLst>
           </p:cNvPr>
@@ -11053,7 +11061,7 @@
           <p:cNvPr id="3" name="">
             <a:extLst xmlns:a="http://schemas.openxmlformats.org/drawingml/2006/main">
               <a:ext uri="{FF2B5EF4-FFF2-40B4-BE49-F238E27FC236}">
-                <a16:creationId xmlns:a16="http://schemas.microsoft.com/office/drawing/2014/main" id="{8D74397D-A478-492F-8CCA-718B84F438F0}"/>
+                <a16:creationId xmlns:a16="http://schemas.microsoft.com/office/drawing/2014/main" id="{3946D82C-C7F8-49AB-8901-C9891677B231}"/>
               </a:ext>
             </a:extLst>
           </p:cNvPr>
@@ -11085,7 +11093,7 @@
           <p:cNvPr id="4" name="">
             <a:extLst xmlns:a="http://schemas.openxmlformats.org/drawingml/2006/main">
               <a:ext uri="{FF2B5EF4-FFF2-40B4-BE49-F238E27FC236}">
-                <a16:creationId xmlns:a16="http://schemas.microsoft.com/office/drawing/2014/main" id="{C9DAB6F0-BBD9-4BCB-8C27-718C4869DFBF}"/>
+                <a16:creationId xmlns:a16="http://schemas.microsoft.com/office/drawing/2014/main" id="{2989E49D-D58A-4FEA-AA3F-F0AA8AACD757}"/>
               </a:ext>
             </a:extLst>
           </p:cNvPr>
@@ -11142,7 +11150,7 @@
           <p:cNvPr id="5" name="">
             <a:extLst xmlns:a="http://schemas.openxmlformats.org/drawingml/2006/main">
               <a:ext uri="{FF2B5EF4-FFF2-40B4-BE49-F238E27FC236}">
-                <a16:creationId xmlns:a16="http://schemas.microsoft.com/office/drawing/2014/main" id="{CD7676C7-39EC-4D04-9D55-DAD0A3F159DF}"/>
+                <a16:creationId xmlns:a16="http://schemas.microsoft.com/office/drawing/2014/main" id="{FC4E485D-F82F-47AF-B449-2957000C0CA5}"/>
               </a:ext>
             </a:extLst>
           </p:cNvPr>
@@ -11199,7 +11207,7 @@
           <p:cNvPr id="6" name="">
             <a:extLst xmlns:a="http://schemas.openxmlformats.org/drawingml/2006/main">
               <a:ext uri="{FF2B5EF4-FFF2-40B4-BE49-F238E27FC236}">
-                <a16:creationId xmlns:a16="http://schemas.microsoft.com/office/drawing/2014/main" id="{D2EE9DF9-8536-45B9-8930-AB379F928F82}"/>
+                <a16:creationId xmlns:a16="http://schemas.microsoft.com/office/drawing/2014/main" id="{D77556CE-082A-4972-AB06-068C37847FEF}"/>
               </a:ext>
             </a:extLst>
           </p:cNvPr>
@@ -11256,7 +11264,7 @@
           <p:cNvPr id="7" name="">
             <a:extLst xmlns:a="http://schemas.openxmlformats.org/drawingml/2006/main">
               <a:ext uri="{FF2B5EF4-FFF2-40B4-BE49-F238E27FC236}">
-                <a16:creationId xmlns:a16="http://schemas.microsoft.com/office/drawing/2014/main" id="{D917F725-15FE-4369-8019-6A9666731CF2}"/>
+                <a16:creationId xmlns:a16="http://schemas.microsoft.com/office/drawing/2014/main" id="{7277D65C-98E2-4CE3-BCEB-EC719145130F}"/>
               </a:ext>
             </a:extLst>
           </p:cNvPr>
@@ -11288,7 +11296,7 @@
           <p:cNvPr id="8" name="">
             <a:extLst xmlns:a="http://schemas.openxmlformats.org/drawingml/2006/main">
               <a:ext uri="{FF2B5EF4-FFF2-40B4-BE49-F238E27FC236}">
-                <a16:creationId xmlns:a16="http://schemas.microsoft.com/office/drawing/2014/main" id="{67400068-44BC-4EE9-A026-E4205CA35EB2}"/>
+                <a16:creationId xmlns:a16="http://schemas.microsoft.com/office/drawing/2014/main" id="{FDE66473-0C61-43EE-82C3-2B17CF5B8E9F}"/>
               </a:ext>
             </a:extLst>
           </p:cNvPr>
@@ -11345,7 +11353,7 @@
           <p:cNvPr id="9" name="">
             <a:extLst xmlns:a="http://schemas.openxmlformats.org/drawingml/2006/main">
               <a:ext uri="{FF2B5EF4-FFF2-40B4-BE49-F238E27FC236}">
-                <a16:creationId xmlns:a16="http://schemas.microsoft.com/office/drawing/2014/main" id="{64F4DF94-9424-4D1E-A028-AA6D17992DC5}"/>
+                <a16:creationId xmlns:a16="http://schemas.microsoft.com/office/drawing/2014/main" id="{38DF4994-370C-45B8-BFAD-D539AFC86C4C}"/>
               </a:ext>
             </a:extLst>
           </p:cNvPr>
@@ -11406,7 +11414,7 @@
           <p:nvPr/>
         </p:nvPicPr>
         <p:blipFill>
-          <a:blip xmlns:r="http://schemas.openxmlformats.org/officeDocument/2006/relationships" xmlns:a="http://schemas.openxmlformats.org/drawingml/2006/main" r:embed="R8f01e6bffb7643f1"/>
+          <a:blip xmlns:r="http://schemas.openxmlformats.org/officeDocument/2006/relationships" xmlns:a="http://schemas.openxmlformats.org/drawingml/2006/main" r:embed="Ra2a903b50f444858"/>
           <a:stretch xmlns:a="http://schemas.openxmlformats.org/drawingml/2006/main"/>
         </p:blipFill>
         <p:spPr>
@@ -11424,7 +11432,7 @@
           <p:cNvPr id="11" name="">
             <a:extLst xmlns:a="http://schemas.openxmlformats.org/drawingml/2006/main">
               <a:ext uri="{FF2B5EF4-FFF2-40B4-BE49-F238E27FC236}">
-                <a16:creationId xmlns:a16="http://schemas.microsoft.com/office/drawing/2014/main" id="{C3650B8C-D286-46A6-BB7D-B702D34920E8}"/>
+                <a16:creationId xmlns:a16="http://schemas.microsoft.com/office/drawing/2014/main" id="{222F73F2-32F1-4E4C-83A4-F7F5CB9AA860}"/>
               </a:ext>
             </a:extLst>
           </p:cNvPr>
@@ -11481,7 +11489,7 @@
           <p:cNvPr id="12" name="">
             <a:extLst xmlns:a="http://schemas.openxmlformats.org/drawingml/2006/main">
               <a:ext uri="{FF2B5EF4-FFF2-40B4-BE49-F238E27FC236}">
-                <a16:creationId xmlns:a16="http://schemas.microsoft.com/office/drawing/2014/main" id="{E5D6B88B-32E6-4580-A9AA-D9524C2E42A4}"/>
+                <a16:creationId xmlns:a16="http://schemas.microsoft.com/office/drawing/2014/main" id="{BE696DF1-D3B4-4690-9D7C-F4075D9550D1}"/>
               </a:ext>
             </a:extLst>
           </p:cNvPr>
@@ -11538,7 +11546,7 @@
           <p:cNvPr id="13" name="">
             <a:extLst xmlns:a="http://schemas.openxmlformats.org/drawingml/2006/main">
               <a:ext uri="{FF2B5EF4-FFF2-40B4-BE49-F238E27FC236}">
-                <a16:creationId xmlns:a16="http://schemas.microsoft.com/office/drawing/2014/main" id="{619D5E24-9C4C-47E9-BCEB-4917E227D989}"/>
+                <a16:creationId xmlns:a16="http://schemas.microsoft.com/office/drawing/2014/main" id="{697C1339-945A-4A87-AE32-3400FE602750}"/>
               </a:ext>
             </a:extLst>
           </p:cNvPr>
@@ -11570,7 +11578,7 @@
           <p:cNvPr id="14" name="">
             <a:extLst xmlns:a="http://schemas.openxmlformats.org/drawingml/2006/main">
               <a:ext uri="{FF2B5EF4-FFF2-40B4-BE49-F238E27FC236}">
-                <a16:creationId xmlns:a16="http://schemas.microsoft.com/office/drawing/2014/main" id="{95298381-8C1F-4BFC-AEB3-23D777184A78}"/>
+                <a16:creationId xmlns:a16="http://schemas.microsoft.com/office/drawing/2014/main" id="{FF5A2E33-9C30-4FCB-B883-FA8160F55A4D}"/>
               </a:ext>
             </a:extLst>
           </p:cNvPr>
@@ -11627,7 +11635,7 @@
           <p:cNvPr id="15" name="">
             <a:extLst xmlns:a="http://schemas.openxmlformats.org/drawingml/2006/main">
               <a:ext uri="{FF2B5EF4-FFF2-40B4-BE49-F238E27FC236}">
-                <a16:creationId xmlns:a16="http://schemas.microsoft.com/office/drawing/2014/main" id="{A11800A1-0829-4392-8591-4968E2394697}"/>
+                <a16:creationId xmlns:a16="http://schemas.microsoft.com/office/drawing/2014/main" id="{B8533E5F-8BDE-4F66-A039-312BB3A8C36F}"/>
               </a:ext>
             </a:extLst>
           </p:cNvPr>
@@ -11682,7 +11690,7 @@
     </p:spTree>
     <p:extLst>
       <p:ext uri="{BB962C8B-B14F-4D97-AF65-F5344CB8AC3E}">
-        <p14:creationId xmlns:p14="http://schemas.microsoft.com/office/powerpoint/2010/main" val="841674645"/>
+        <p14:creationId xmlns:p14="http://schemas.microsoft.com/office/powerpoint/2010/main" val="2022594681"/>
       </p:ext>
     </p:extLst>
   </p:cSld>
@@ -11837,7 +11845,7 @@
           <p:cNvPr id="23" name="">
             <a:extLst xmlns:a="http://schemas.openxmlformats.org/drawingml/2006/main">
               <a:ext uri="{FF2B5EF4-FFF2-40B4-BE49-F238E27FC236}">
-                <a16:creationId xmlns:a16="http://schemas.microsoft.com/office/drawing/2014/main" id="{45C71D5F-2CB1-432E-828E-B1F27DD6BA01}"/>
+                <a16:creationId xmlns:a16="http://schemas.microsoft.com/office/drawing/2014/main" id="{4ED3D2B2-64E8-47B2-B384-E802976512B5}"/>
               </a:ext>
             </a:extLst>
           </p:cNvPr>
@@ -11869,7 +11877,7 @@
           <p:cNvPr id="2" name="">
             <a:extLst xmlns:a="http://schemas.openxmlformats.org/drawingml/2006/main">
               <a:ext uri="{FF2B5EF4-FFF2-40B4-BE49-F238E27FC236}">
-                <a16:creationId xmlns:a16="http://schemas.microsoft.com/office/drawing/2014/main" id="{02CC48EE-1431-4C84-94C2-69AC8C2E6CA6}"/>
+                <a16:creationId xmlns:a16="http://schemas.microsoft.com/office/drawing/2014/main" id="{2975EA99-C29A-4F79-A3CE-1B6F8DE22477}"/>
               </a:ext>
             </a:extLst>
           </p:cNvPr>
@@ -11926,7 +11934,7 @@
           <p:cNvPr id="3" name="">
             <a:extLst xmlns:a="http://schemas.openxmlformats.org/drawingml/2006/main">
               <a:ext uri="{FF2B5EF4-FFF2-40B4-BE49-F238E27FC236}">
-                <a16:creationId xmlns:a16="http://schemas.microsoft.com/office/drawing/2014/main" id="{74D1363B-3BDA-49A3-9955-6047CEF301FA}"/>
+                <a16:creationId xmlns:a16="http://schemas.microsoft.com/office/drawing/2014/main" id="{4D8FB0D4-BC32-4A67-B51A-8DC041708CEA}"/>
               </a:ext>
             </a:extLst>
           </p:cNvPr>
@@ -11958,7 +11966,7 @@
           <p:cNvPr id="4" name="">
             <a:extLst xmlns:a="http://schemas.openxmlformats.org/drawingml/2006/main">
               <a:ext uri="{FF2B5EF4-FFF2-40B4-BE49-F238E27FC236}">
-                <a16:creationId xmlns:a16="http://schemas.microsoft.com/office/drawing/2014/main" id="{BE69D766-5C72-4EE6-9B51-27B6D832BC64}"/>
+                <a16:creationId xmlns:a16="http://schemas.microsoft.com/office/drawing/2014/main" id="{3F97B2CB-2CB9-4685-8AD0-F6BA4FE94CB6}"/>
               </a:ext>
             </a:extLst>
           </p:cNvPr>
@@ -12015,7 +12023,7 @@
           <p:cNvPr id="5" name="">
             <a:extLst xmlns:a="http://schemas.openxmlformats.org/drawingml/2006/main">
               <a:ext uri="{FF2B5EF4-FFF2-40B4-BE49-F238E27FC236}">
-                <a16:creationId xmlns:a16="http://schemas.microsoft.com/office/drawing/2014/main" id="{67AEE74E-EC05-4230-91A0-D71081CE8709}"/>
+                <a16:creationId xmlns:a16="http://schemas.microsoft.com/office/drawing/2014/main" id="{9693A5B3-13C5-4CB8-8B1E-11E21B570CBA}"/>
               </a:ext>
             </a:extLst>
           </p:cNvPr>
@@ -12072,7 +12080,7 @@
           <p:cNvPr id="6" name="">
             <a:extLst xmlns:a="http://schemas.openxmlformats.org/drawingml/2006/main">
               <a:ext uri="{FF2B5EF4-FFF2-40B4-BE49-F238E27FC236}">
-                <a16:creationId xmlns:a16="http://schemas.microsoft.com/office/drawing/2014/main" id="{55A37366-3CA0-4EE8-8A7B-F111C54151AA}"/>
+                <a16:creationId xmlns:a16="http://schemas.microsoft.com/office/drawing/2014/main" id="{5E6C2098-6E73-4043-932A-FE9ABC97B563}"/>
               </a:ext>
             </a:extLst>
           </p:cNvPr>
@@ -12129,7 +12137,7 @@
           <p:cNvPr id="7" name="">
             <a:extLst xmlns:a="http://schemas.openxmlformats.org/drawingml/2006/main">
               <a:ext uri="{FF2B5EF4-FFF2-40B4-BE49-F238E27FC236}">
-                <a16:creationId xmlns:a16="http://schemas.microsoft.com/office/drawing/2014/main" id="{28DC4A48-D6FB-4124-8939-34403A91CD15}"/>
+                <a16:creationId xmlns:a16="http://schemas.microsoft.com/office/drawing/2014/main" id="{40D57069-B388-4EE5-AC76-9BCC226BDFA2}"/>
               </a:ext>
             </a:extLst>
           </p:cNvPr>
@@ -12161,7 +12169,7 @@
           <p:cNvPr id="8" name="">
             <a:extLst xmlns:a="http://schemas.openxmlformats.org/drawingml/2006/main">
               <a:ext uri="{FF2B5EF4-FFF2-40B4-BE49-F238E27FC236}">
-                <a16:creationId xmlns:a16="http://schemas.microsoft.com/office/drawing/2014/main" id="{0FF7B8F0-2D5C-4B7E-9881-A4BB8CE8005F}"/>
+                <a16:creationId xmlns:a16="http://schemas.microsoft.com/office/drawing/2014/main" id="{F431B0B6-9A7A-4FC6-9D17-4CF612E7E2B9}"/>
               </a:ext>
             </a:extLst>
           </p:cNvPr>
@@ -12218,7 +12226,7 @@
           <p:cNvPr id="9" name="">
             <a:extLst xmlns:a="http://schemas.openxmlformats.org/drawingml/2006/main">
               <a:ext uri="{FF2B5EF4-FFF2-40B4-BE49-F238E27FC236}">
-                <a16:creationId xmlns:a16="http://schemas.microsoft.com/office/drawing/2014/main" id="{7E91A398-3D0D-4FA0-BD7B-CBD8B0122B6D}"/>
+                <a16:creationId xmlns:a16="http://schemas.microsoft.com/office/drawing/2014/main" id="{05FDF031-A2F0-46F4-BA8B-47CD0DA1FBB1}"/>
               </a:ext>
             </a:extLst>
           </p:cNvPr>
@@ -12275,7 +12283,7 @@
           <p:cNvPr id="10" name="">
             <a:extLst xmlns:a="http://schemas.openxmlformats.org/drawingml/2006/main">
               <a:ext uri="{FF2B5EF4-FFF2-40B4-BE49-F238E27FC236}">
-                <a16:creationId xmlns:a16="http://schemas.microsoft.com/office/drawing/2014/main" id="{C6D23FBF-B2FE-431A-8AD6-5B1D82452C01}"/>
+                <a16:creationId xmlns:a16="http://schemas.microsoft.com/office/drawing/2014/main" id="{3F082D5C-078D-4684-8FFB-3C91E83314EB}"/>
               </a:ext>
             </a:extLst>
           </p:cNvPr>
@@ -12309,7 +12317,7 @@
           <p:cNvPr id="11" name="">
             <a:extLst xmlns:a="http://schemas.openxmlformats.org/drawingml/2006/main">
               <a:ext uri="{FF2B5EF4-FFF2-40B4-BE49-F238E27FC236}">
-                <a16:creationId xmlns:a16="http://schemas.microsoft.com/office/drawing/2014/main" id="{3656BA6F-5136-4A11-A685-292D0F91DAE4}"/>
+                <a16:creationId xmlns:a16="http://schemas.microsoft.com/office/drawing/2014/main" id="{1BE11FCE-41A2-4993-B81F-825A0F7BCAFE}"/>
               </a:ext>
             </a:extLst>
           </p:cNvPr>
@@ -12341,7 +12349,7 @@
           <p:cNvPr id="12" name="">
             <a:extLst xmlns:a="http://schemas.openxmlformats.org/drawingml/2006/main">
               <a:ext uri="{FF2B5EF4-FFF2-40B4-BE49-F238E27FC236}">
-                <a16:creationId xmlns:a16="http://schemas.microsoft.com/office/drawing/2014/main" id="{6491E106-469C-44D4-A057-2DF6AACAADCF}"/>
+                <a16:creationId xmlns:a16="http://schemas.microsoft.com/office/drawing/2014/main" id="{5E667A5F-6B85-41F9-9DC9-01B901960E46}"/>
               </a:ext>
             </a:extLst>
           </p:cNvPr>
@@ -12398,7 +12406,7 @@
           <p:cNvPr id="13" name="">
             <a:extLst xmlns:a="http://schemas.openxmlformats.org/drawingml/2006/main">
               <a:ext uri="{FF2B5EF4-FFF2-40B4-BE49-F238E27FC236}">
-                <a16:creationId xmlns:a16="http://schemas.microsoft.com/office/drawing/2014/main" id="{104A7FC8-439D-42DC-9E2A-F9756D51A7D7}"/>
+                <a16:creationId xmlns:a16="http://schemas.microsoft.com/office/drawing/2014/main" id="{E2BF8E6C-7A9D-4E2D-82D5-DD740721BEE9}"/>
               </a:ext>
             </a:extLst>
           </p:cNvPr>
@@ -12455,7 +12463,7 @@
           <p:cNvPr id="14" name="">
             <a:extLst xmlns:a="http://schemas.openxmlformats.org/drawingml/2006/main">
               <a:ext uri="{FF2B5EF4-FFF2-40B4-BE49-F238E27FC236}">
-                <a16:creationId xmlns:a16="http://schemas.microsoft.com/office/drawing/2014/main" id="{C81DBD1F-D52F-41CA-9714-AF2D5CB48AF9}"/>
+                <a16:creationId xmlns:a16="http://schemas.microsoft.com/office/drawing/2014/main" id="{379F2CF4-20B2-4249-BB74-006D6B4EF55F}"/>
               </a:ext>
             </a:extLst>
           </p:cNvPr>
@@ -12489,7 +12497,7 @@
           <p:cNvPr id="15" name="">
             <a:extLst xmlns:a="http://schemas.openxmlformats.org/drawingml/2006/main">
               <a:ext uri="{FF2B5EF4-FFF2-40B4-BE49-F238E27FC236}">
-                <a16:creationId xmlns:a16="http://schemas.microsoft.com/office/drawing/2014/main" id="{3336B3E6-FF37-4CF2-9CE2-B561A10A4088}"/>
+                <a16:creationId xmlns:a16="http://schemas.microsoft.com/office/drawing/2014/main" id="{6203E13F-B370-4B14-B0E0-EF0F4EDB5373}"/>
               </a:ext>
             </a:extLst>
           </p:cNvPr>
@@ -12521,7 +12529,7 @@
           <p:cNvPr id="16" name="">
             <a:extLst xmlns:a="http://schemas.openxmlformats.org/drawingml/2006/main">
               <a:ext uri="{FF2B5EF4-FFF2-40B4-BE49-F238E27FC236}">
-                <a16:creationId xmlns:a16="http://schemas.microsoft.com/office/drawing/2014/main" id="{E2564A1A-F425-4656-9150-86BF00534B56}"/>
+                <a16:creationId xmlns:a16="http://schemas.microsoft.com/office/drawing/2014/main" id="{511C6D3A-8C96-489A-A417-82CF0CBDE7D6}"/>
               </a:ext>
             </a:extLst>
           </p:cNvPr>
@@ -12578,7 +12586,7 @@
           <p:cNvPr id="17" name="">
             <a:extLst xmlns:a="http://schemas.openxmlformats.org/drawingml/2006/main">
               <a:ext uri="{FF2B5EF4-FFF2-40B4-BE49-F238E27FC236}">
-                <a16:creationId xmlns:a16="http://schemas.microsoft.com/office/drawing/2014/main" id="{3B763DEC-01EA-4E86-839D-E5B0231F3CA9}"/>
+                <a16:creationId xmlns:a16="http://schemas.microsoft.com/office/drawing/2014/main" id="{25934613-8DD0-455A-AA96-A2F3F7022022}"/>
               </a:ext>
             </a:extLst>
           </p:cNvPr>
@@ -12635,7 +12643,7 @@
           <p:cNvPr id="18" name="">
             <a:extLst xmlns:a="http://schemas.openxmlformats.org/drawingml/2006/main">
               <a:ext uri="{FF2B5EF4-FFF2-40B4-BE49-F238E27FC236}">
-                <a16:creationId xmlns:a16="http://schemas.microsoft.com/office/drawing/2014/main" id="{16315A3B-CBDE-4A90-9F99-D8B72D57A12C}"/>
+                <a16:creationId xmlns:a16="http://schemas.microsoft.com/office/drawing/2014/main" id="{60AA970C-A058-4D92-A695-3C14A9DFE006}"/>
               </a:ext>
             </a:extLst>
           </p:cNvPr>
@@ -12669,7 +12677,7 @@
           <p:cNvPr id="19" name="">
             <a:extLst xmlns:a="http://schemas.openxmlformats.org/drawingml/2006/main">
               <a:ext uri="{FF2B5EF4-FFF2-40B4-BE49-F238E27FC236}">
-                <a16:creationId xmlns:a16="http://schemas.microsoft.com/office/drawing/2014/main" id="{7872C170-37E3-4708-BE88-3F36F0CF951D}"/>
+                <a16:creationId xmlns:a16="http://schemas.microsoft.com/office/drawing/2014/main" id="{C6330765-E6F0-48C9-8C3F-02AEE0C9E00D}"/>
               </a:ext>
             </a:extLst>
           </p:cNvPr>
@@ -12701,7 +12709,7 @@
           <p:cNvPr id="20" name="">
             <a:extLst xmlns:a="http://schemas.openxmlformats.org/drawingml/2006/main">
               <a:ext uri="{FF2B5EF4-FFF2-40B4-BE49-F238E27FC236}">
-                <a16:creationId xmlns:a16="http://schemas.microsoft.com/office/drawing/2014/main" id="{1CA05BA8-09E0-4FAE-9CC0-E1987818F206}"/>
+                <a16:creationId xmlns:a16="http://schemas.microsoft.com/office/drawing/2014/main" id="{D3196AAB-BA2C-4F1B-8B90-D78D73472F1D}"/>
               </a:ext>
             </a:extLst>
           </p:cNvPr>
@@ -12758,7 +12766,7 @@
           <p:cNvPr id="21" name="">
             <a:extLst xmlns:a="http://schemas.openxmlformats.org/drawingml/2006/main">
               <a:ext uri="{FF2B5EF4-FFF2-40B4-BE49-F238E27FC236}">
-                <a16:creationId xmlns:a16="http://schemas.microsoft.com/office/drawing/2014/main" id="{A6E96D48-1640-4E1E-821C-3C4008674719}"/>
+                <a16:creationId xmlns:a16="http://schemas.microsoft.com/office/drawing/2014/main" id="{00B411B3-4670-4012-AF9D-C59A65BD19AB}"/>
               </a:ext>
             </a:extLst>
           </p:cNvPr>
@@ -12815,7 +12823,7 @@
           <p:cNvPr id="22" name="">
             <a:extLst xmlns:a="http://schemas.openxmlformats.org/drawingml/2006/main">
               <a:ext uri="{FF2B5EF4-FFF2-40B4-BE49-F238E27FC236}">
-                <a16:creationId xmlns:a16="http://schemas.microsoft.com/office/drawing/2014/main" id="{06B70558-0321-42D6-A3AC-9AD872993538}"/>
+                <a16:creationId xmlns:a16="http://schemas.microsoft.com/office/drawing/2014/main" id="{D4F369A1-7CCD-4430-85DA-83D694878199}"/>
               </a:ext>
             </a:extLst>
           </p:cNvPr>
@@ -12870,7 +12878,7 @@
     </p:spTree>
     <p:extLst>
       <p:ext uri="{BB962C8B-B14F-4D97-AF65-F5344CB8AC3E}">
-        <p14:creationId xmlns:p14="http://schemas.microsoft.com/office/powerpoint/2010/main" val="578542607"/>
+        <p14:creationId xmlns:p14="http://schemas.microsoft.com/office/powerpoint/2010/main" val="1189245672"/>
       </p:ext>
     </p:extLst>
   </p:cSld>
@@ -13071,7 +13079,7 @@
           <p:cNvPr id="22" name="">
             <a:extLst xmlns:a="http://schemas.openxmlformats.org/drawingml/2006/main">
               <a:ext uri="{FF2B5EF4-FFF2-40B4-BE49-F238E27FC236}">
-                <a16:creationId xmlns:a16="http://schemas.microsoft.com/office/drawing/2014/main" id="{8D8A823D-217B-4FDC-AB03-50B4C19A19F0}"/>
+                <a16:creationId xmlns:a16="http://schemas.microsoft.com/office/drawing/2014/main" id="{389FA3A1-C3E4-45C7-BE0B-080493E1D273}"/>
               </a:ext>
             </a:extLst>
           </p:cNvPr>
@@ -13103,7 +13111,7 @@
           <p:cNvPr id="2" name="">
             <a:extLst xmlns:a="http://schemas.openxmlformats.org/drawingml/2006/main">
               <a:ext uri="{FF2B5EF4-FFF2-40B4-BE49-F238E27FC236}">
-                <a16:creationId xmlns:a16="http://schemas.microsoft.com/office/drawing/2014/main" id="{F43BAEBD-EEF8-4930-AC48-E7175D93B0CF}"/>
+                <a16:creationId xmlns:a16="http://schemas.microsoft.com/office/drawing/2014/main" id="{90526751-60AC-46BB-A88B-040C2E65F1CF}"/>
               </a:ext>
             </a:extLst>
           </p:cNvPr>
@@ -13160,7 +13168,7 @@
           <p:cNvPr id="3" name="">
             <a:extLst xmlns:a="http://schemas.openxmlformats.org/drawingml/2006/main">
               <a:ext uri="{FF2B5EF4-FFF2-40B4-BE49-F238E27FC236}">
-                <a16:creationId xmlns:a16="http://schemas.microsoft.com/office/drawing/2014/main" id="{C17F8A1E-2D08-44E8-B612-7D09F6B4FCB5}"/>
+                <a16:creationId xmlns:a16="http://schemas.microsoft.com/office/drawing/2014/main" id="{7BF27E18-5EB0-441B-8852-457CEA5166A8}"/>
               </a:ext>
             </a:extLst>
           </p:cNvPr>
@@ -13192,7 +13200,7 @@
           <p:cNvPr id="4" name="">
             <a:extLst xmlns:a="http://schemas.openxmlformats.org/drawingml/2006/main">
               <a:ext uri="{FF2B5EF4-FFF2-40B4-BE49-F238E27FC236}">
-                <a16:creationId xmlns:a16="http://schemas.microsoft.com/office/drawing/2014/main" id="{7FE9B21E-9452-46E4-80C5-6A2CB879B25A}"/>
+                <a16:creationId xmlns:a16="http://schemas.microsoft.com/office/drawing/2014/main" id="{B77EB9CA-75C5-49FA-BC18-DAFB792F8F7A}"/>
               </a:ext>
             </a:extLst>
           </p:cNvPr>
@@ -13249,7 +13257,7 @@
           <p:cNvPr id="5" name="">
             <a:extLst xmlns:a="http://schemas.openxmlformats.org/drawingml/2006/main">
               <a:ext uri="{FF2B5EF4-FFF2-40B4-BE49-F238E27FC236}">
-                <a16:creationId xmlns:a16="http://schemas.microsoft.com/office/drawing/2014/main" id="{4F69FCE1-EE2D-41D4-B9B6-56C6B911DC32}"/>
+                <a16:creationId xmlns:a16="http://schemas.microsoft.com/office/drawing/2014/main" id="{B526BFF5-7C7C-426F-8FF4-583A89B99BB4}"/>
               </a:ext>
             </a:extLst>
           </p:cNvPr>
@@ -13306,7 +13314,7 @@
           <p:cNvPr id="6" name="">
             <a:extLst xmlns:a="http://schemas.openxmlformats.org/drawingml/2006/main">
               <a:ext uri="{FF2B5EF4-FFF2-40B4-BE49-F238E27FC236}">
-                <a16:creationId xmlns:a16="http://schemas.microsoft.com/office/drawing/2014/main" id="{67D648CE-342E-49B3-8150-4D2809171090}"/>
+                <a16:creationId xmlns:a16="http://schemas.microsoft.com/office/drawing/2014/main" id="{5F27B175-E787-4666-9286-3241BC9DDB64}"/>
               </a:ext>
             </a:extLst>
           </p:cNvPr>
@@ -13363,7 +13371,7 @@
           <p:cNvPr id="7" name="">
             <a:extLst xmlns:a="http://schemas.openxmlformats.org/drawingml/2006/main">
               <a:ext uri="{FF2B5EF4-FFF2-40B4-BE49-F238E27FC236}">
-                <a16:creationId xmlns:a16="http://schemas.microsoft.com/office/drawing/2014/main" id="{7F5A8F65-4B2D-4C22-B069-7F9CC79A9984}"/>
+                <a16:creationId xmlns:a16="http://schemas.microsoft.com/office/drawing/2014/main" id="{8D0ECDF7-65F2-4CA1-9400-79480C8888FF}"/>
               </a:ext>
             </a:extLst>
           </p:cNvPr>
@@ -13395,7 +13403,7 @@
           <p:cNvPr id="8" name="">
             <a:extLst xmlns:a="http://schemas.openxmlformats.org/drawingml/2006/main">
               <a:ext uri="{FF2B5EF4-FFF2-40B4-BE49-F238E27FC236}">
-                <a16:creationId xmlns:a16="http://schemas.microsoft.com/office/drawing/2014/main" id="{2B753856-69EF-4B74-AE4D-A0CD2E4ED397}"/>
+                <a16:creationId xmlns:a16="http://schemas.microsoft.com/office/drawing/2014/main" id="{1643A031-155F-4CAA-88B6-0E358D6D78D0}"/>
               </a:ext>
             </a:extLst>
           </p:cNvPr>
@@ -13452,7 +13460,7 @@
           <p:cNvPr id="9" name="">
             <a:extLst xmlns:a="http://schemas.openxmlformats.org/drawingml/2006/main">
               <a:ext uri="{FF2B5EF4-FFF2-40B4-BE49-F238E27FC236}">
-                <a16:creationId xmlns:a16="http://schemas.microsoft.com/office/drawing/2014/main" id="{728C5EF2-6118-4AEF-9B2D-CACA0F3B199C}"/>
+                <a16:creationId xmlns:a16="http://schemas.microsoft.com/office/drawing/2014/main" id="{AD3D8892-E33C-4BEA-BAA9-CB5658395F55}"/>
               </a:ext>
             </a:extLst>
           </p:cNvPr>
@@ -13509,7 +13517,7 @@
           <p:cNvPr id="10" name="">
             <a:extLst xmlns:a="http://schemas.openxmlformats.org/drawingml/2006/main">
               <a:ext uri="{FF2B5EF4-FFF2-40B4-BE49-F238E27FC236}">
-                <a16:creationId xmlns:a16="http://schemas.microsoft.com/office/drawing/2014/main" id="{01E4B27B-9D8A-419C-963D-99F6B9B7C5E1}"/>
+                <a16:creationId xmlns:a16="http://schemas.microsoft.com/office/drawing/2014/main" id="{22D131FB-291A-430F-B377-5A23768F305C}"/>
               </a:ext>
             </a:extLst>
           </p:cNvPr>
@@ -13543,7 +13551,7 @@
           <p:cNvPr id="11" name="">
             <a:extLst xmlns:a="http://schemas.openxmlformats.org/drawingml/2006/main">
               <a:ext uri="{FF2B5EF4-FFF2-40B4-BE49-F238E27FC236}">
-                <a16:creationId xmlns:a16="http://schemas.microsoft.com/office/drawing/2014/main" id="{4A9DBCBB-C443-4810-AE6B-2620F1A75779}"/>
+                <a16:creationId xmlns:a16="http://schemas.microsoft.com/office/drawing/2014/main" id="{2923D769-A09F-4F32-90C3-EE5340ABA10F}"/>
               </a:ext>
             </a:extLst>
           </p:cNvPr>
@@ -13575,7 +13583,7 @@
           <p:cNvPr id="12" name="">
             <a:extLst xmlns:a="http://schemas.openxmlformats.org/drawingml/2006/main">
               <a:ext uri="{FF2B5EF4-FFF2-40B4-BE49-F238E27FC236}">
-                <a16:creationId xmlns:a16="http://schemas.microsoft.com/office/drawing/2014/main" id="{A1F17101-014C-4EDB-A80B-098085C099AE}"/>
+                <a16:creationId xmlns:a16="http://schemas.microsoft.com/office/drawing/2014/main" id="{717867C8-0152-4DE8-BE7B-D707AF39EB74}"/>
               </a:ext>
             </a:extLst>
           </p:cNvPr>
@@ -13632,7 +13640,7 @@
           <p:cNvPr id="13" name="">
             <a:extLst xmlns:a="http://schemas.openxmlformats.org/drawingml/2006/main">
               <a:ext uri="{FF2B5EF4-FFF2-40B4-BE49-F238E27FC236}">
-                <a16:creationId xmlns:a16="http://schemas.microsoft.com/office/drawing/2014/main" id="{3AAB7413-E508-43E3-BAFE-26717EC8014B}"/>
+                <a16:creationId xmlns:a16="http://schemas.microsoft.com/office/drawing/2014/main" id="{A39E53BD-E842-4DF1-BFE4-11A7F06F8291}"/>
               </a:ext>
             </a:extLst>
           </p:cNvPr>
@@ -13689,7 +13697,7 @@
           <p:cNvPr id="14" name="">
             <a:extLst xmlns:a="http://schemas.openxmlformats.org/drawingml/2006/main">
               <a:ext uri="{FF2B5EF4-FFF2-40B4-BE49-F238E27FC236}">
-                <a16:creationId xmlns:a16="http://schemas.microsoft.com/office/drawing/2014/main" id="{085ACA7E-0B00-4DAF-AE1E-CDBB9D7EE22A}"/>
+                <a16:creationId xmlns:a16="http://schemas.microsoft.com/office/drawing/2014/main" id="{DEEDB6AD-8B8B-407D-B323-EAA2B770B9A0}"/>
               </a:ext>
             </a:extLst>
           </p:cNvPr>
@@ -13723,7 +13731,7 @@
           <p:cNvPr id="15" name="">
             <a:extLst xmlns:a="http://schemas.openxmlformats.org/drawingml/2006/main">
               <a:ext uri="{FF2B5EF4-FFF2-40B4-BE49-F238E27FC236}">
-                <a16:creationId xmlns:a16="http://schemas.microsoft.com/office/drawing/2014/main" id="{A6DB963F-B6D5-44A1-8D66-F06CE86C64BD}"/>
+                <a16:creationId xmlns:a16="http://schemas.microsoft.com/office/drawing/2014/main" id="{EFAC232C-2F29-491B-9609-DAD79430B034}"/>
               </a:ext>
             </a:extLst>
           </p:cNvPr>
@@ -13755,7 +13763,7 @@
           <p:cNvPr id="16" name="">
             <a:extLst xmlns:a="http://schemas.openxmlformats.org/drawingml/2006/main">
               <a:ext uri="{FF2B5EF4-FFF2-40B4-BE49-F238E27FC236}">
-                <a16:creationId xmlns:a16="http://schemas.microsoft.com/office/drawing/2014/main" id="{061306E5-0E4E-4351-9733-6DE5645ED3C8}"/>
+                <a16:creationId xmlns:a16="http://schemas.microsoft.com/office/drawing/2014/main" id="{6C81F0A3-1233-4E9C-BD84-8333FCC76D07}"/>
               </a:ext>
             </a:extLst>
           </p:cNvPr>
@@ -13812,7 +13820,7 @@
           <p:cNvPr id="17" name="">
             <a:extLst xmlns:a="http://schemas.openxmlformats.org/drawingml/2006/main">
               <a:ext uri="{FF2B5EF4-FFF2-40B4-BE49-F238E27FC236}">
-                <a16:creationId xmlns:a16="http://schemas.microsoft.com/office/drawing/2014/main" id="{273B743A-DDA2-4FE2-8E38-5A3FA0AE4A0F}"/>
+                <a16:creationId xmlns:a16="http://schemas.microsoft.com/office/drawing/2014/main" id="{48B1DB24-DA5B-4C5E-9D2A-41408114B32F}"/>
               </a:ext>
             </a:extLst>
           </p:cNvPr>
@@ -13869,7 +13877,7 @@
           <p:cNvPr id="18" name="">
             <a:extLst xmlns:a="http://schemas.openxmlformats.org/drawingml/2006/main">
               <a:ext uri="{FF2B5EF4-FFF2-40B4-BE49-F238E27FC236}">
-                <a16:creationId xmlns:a16="http://schemas.microsoft.com/office/drawing/2014/main" id="{8D5A1F36-65BC-4F5B-8BC3-624A6CCD07E6}"/>
+                <a16:creationId xmlns:a16="http://schemas.microsoft.com/office/drawing/2014/main" id="{1845FC1F-6198-45F5-BF97-6BD2BFDD6E7E}"/>
               </a:ext>
             </a:extLst>
           </p:cNvPr>
@@ -13903,7 +13911,7 @@
           <p:cNvPr id="19" name="">
             <a:extLst xmlns:a="http://schemas.openxmlformats.org/drawingml/2006/main">
               <a:ext uri="{FF2B5EF4-FFF2-40B4-BE49-F238E27FC236}">
-                <a16:creationId xmlns:a16="http://schemas.microsoft.com/office/drawing/2014/main" id="{21401451-4BCD-4270-B0C3-AAEDA537B62F}"/>
+                <a16:creationId xmlns:a16="http://schemas.microsoft.com/office/drawing/2014/main" id="{E798762D-7B22-47DA-AAE5-A5DE14D9B588}"/>
               </a:ext>
             </a:extLst>
           </p:cNvPr>
@@ -13935,7 +13943,7 @@
           <p:cNvPr id="20" name="">
             <a:extLst xmlns:a="http://schemas.openxmlformats.org/drawingml/2006/main">
               <a:ext uri="{FF2B5EF4-FFF2-40B4-BE49-F238E27FC236}">
-                <a16:creationId xmlns:a16="http://schemas.microsoft.com/office/drawing/2014/main" id="{991E9FFD-F07A-4EFE-8678-AEC057D775DD}"/>
+                <a16:creationId xmlns:a16="http://schemas.microsoft.com/office/drawing/2014/main" id="{B6DB6459-95EB-442E-A170-64134D756784}"/>
               </a:ext>
             </a:extLst>
           </p:cNvPr>
@@ -13992,7 +14000,7 @@
           <p:cNvPr id="21" name="">
             <a:extLst xmlns:a="http://schemas.openxmlformats.org/drawingml/2006/main">
               <a:ext uri="{FF2B5EF4-FFF2-40B4-BE49-F238E27FC236}">
-                <a16:creationId xmlns:a16="http://schemas.microsoft.com/office/drawing/2014/main" id="{4242577B-424D-4A51-8606-EBD1034A8045}"/>
+                <a16:creationId xmlns:a16="http://schemas.microsoft.com/office/drawing/2014/main" id="{A1E28389-8E20-49C8-B6CB-BB77B20C8AF6}"/>
               </a:ext>
             </a:extLst>
           </p:cNvPr>
@@ -14047,7 +14055,7 @@
     </p:spTree>
     <p:extLst>
       <p:ext uri="{BB962C8B-B14F-4D97-AF65-F5344CB8AC3E}">
-        <p14:creationId xmlns:p14="http://schemas.microsoft.com/office/powerpoint/2010/main" val="1964494281"/>
+        <p14:creationId xmlns:p14="http://schemas.microsoft.com/office/powerpoint/2010/main" val="934000915"/>
       </p:ext>
     </p:extLst>
   </p:cSld>
